--- a/templates/30x10.5/cni.pptx
+++ b/templates/30x10.5/cni.pptx
@@ -4136,8 +4136,8 @@
         </p:nvSpPr>
         <p:spPr bwMode="auto">
           <a:xfrm>
-            <a:off x="4763" y="4676775"/>
-            <a:ext cx="9921875" cy="1631950"/>
+            <a:off x="0" y="4424361"/>
+            <a:ext cx="9906000" cy="954093"/>
           </a:xfrm>
           <a:prstGeom prst="rect">
             <a:avLst/>
@@ -4167,7 +4167,7 @@
           </a:extLst>
         </p:spPr>
         <p:txBody>
-          <a:bodyPr lIns="91426" tIns="45713" rIns="91426" bIns="45713">
+          <a:bodyPr wrap="square" lIns="91426" tIns="45713" rIns="91426" bIns="45713">
             <a:spAutoFit/>
           </a:bodyPr>
           <a:lstStyle>
@@ -4305,225 +4305,6 @@
                 <a:latin typeface="Arial Black" panose="020B0A04020102020204" pitchFamily="34" charset="0"/>
               </a:rPr>
               <a:t>NOME</a:t>
-            </a:r>
-          </a:p>
-          <a:p>
-            <a:pPr algn="ctr" eaLnBrk="1" hangingPunct="1">
-              <a:spcBef>
-                <a:spcPct val="0"/>
-              </a:spcBef>
-              <a:buFontTx/>
-              <a:buNone/>
-            </a:pPr>
-            <a:r>
-              <a:rPr lang="pt-BR" altLang="pt-BR" sz="4000" b="1" dirty="0">
-                <a:latin typeface="Arial Black" panose="020B0A04020102020204" pitchFamily="34" charset="0"/>
-              </a:rPr>
-              <a:t>CARGO</a:t>
-            </a:r>
-          </a:p>
-        </p:txBody>
-      </p:sp>
-      <p:sp>
-        <p:nvSpPr>
-          <p:cNvPr id="3075" name="Text Box 9">
-            <a:extLst>
-              <a:ext uri="{FF2B5EF4-FFF2-40B4-BE49-F238E27FC236}">
-                <a16:creationId xmlns:a16="http://schemas.microsoft.com/office/drawing/2014/main" id="{7FE84379-0892-FCC9-7DED-1D348A2B8E4D}"/>
-              </a:ext>
-            </a:extLst>
-          </p:cNvPr>
-          <p:cNvSpPr txBox="1">
-            <a:spLocks noChangeArrowheads="1"/>
-          </p:cNvSpPr>
-          <p:nvPr/>
-        </p:nvSpPr>
-        <p:spPr bwMode="auto">
-          <a:xfrm flipV="1">
-            <a:off x="-15875" y="549275"/>
-            <a:ext cx="9921875" cy="1631950"/>
-          </a:xfrm>
-          <a:prstGeom prst="rect">
-            <a:avLst/>
-          </a:prstGeom>
-          <a:noFill/>
-          <a:ln>
-            <a:noFill/>
-          </a:ln>
-          <a:extLst>
-            <a:ext uri="{909E8E84-426E-40DD-AFC4-6F175D3DCCD1}">
-              <a14:hiddenFill xmlns:a14="http://schemas.microsoft.com/office/drawing/2010/main">
-                <a:solidFill>
-                  <a:srgbClr val="FFFFFF"/>
-                </a:solidFill>
-              </a14:hiddenFill>
-            </a:ext>
-            <a:ext uri="{91240B29-F687-4F45-9708-019B960494DF}">
-              <a14:hiddenLine xmlns:a14="http://schemas.microsoft.com/office/drawing/2010/main" w="9525">
-                <a:solidFill>
-                  <a:srgbClr val="000000"/>
-                </a:solidFill>
-                <a:miter lim="800000"/>
-                <a:headEnd/>
-                <a:tailEnd/>
-              </a14:hiddenLine>
-            </a:ext>
-          </a:extLst>
-        </p:spPr>
-        <p:txBody>
-          <a:bodyPr lIns="91426" tIns="45713" rIns="91426" bIns="45713">
-            <a:spAutoFit/>
-          </a:bodyPr>
-          <a:lstStyle>
-            <a:lvl1pPr>
-              <a:spcBef>
-                <a:spcPct val="20000"/>
-              </a:spcBef>
-              <a:buChar char="•"/>
-              <a:defRPr sz="3200">
-                <a:solidFill>
-                  <a:schemeClr val="tx1"/>
-                </a:solidFill>
-                <a:latin typeface="Arial" panose="020B0604020202020204" pitchFamily="34" charset="0"/>
-              </a:defRPr>
-            </a:lvl1pPr>
-            <a:lvl2pPr marL="742950" indent="-285750">
-              <a:spcBef>
-                <a:spcPct val="20000"/>
-              </a:spcBef>
-              <a:buChar char="–"/>
-              <a:defRPr sz="2800">
-                <a:solidFill>
-                  <a:schemeClr val="tx1"/>
-                </a:solidFill>
-                <a:latin typeface="Arial" panose="020B0604020202020204" pitchFamily="34" charset="0"/>
-              </a:defRPr>
-            </a:lvl2pPr>
-            <a:lvl3pPr marL="1143000" indent="-228600">
-              <a:spcBef>
-                <a:spcPct val="20000"/>
-              </a:spcBef>
-              <a:buChar char="•"/>
-              <a:defRPr sz="2400">
-                <a:solidFill>
-                  <a:schemeClr val="tx1"/>
-                </a:solidFill>
-                <a:latin typeface="Arial" panose="020B0604020202020204" pitchFamily="34" charset="0"/>
-              </a:defRPr>
-            </a:lvl3pPr>
-            <a:lvl4pPr marL="1600200" indent="-228600">
-              <a:spcBef>
-                <a:spcPct val="20000"/>
-              </a:spcBef>
-              <a:buChar char="–"/>
-              <a:defRPr sz="2000">
-                <a:solidFill>
-                  <a:schemeClr val="tx1"/>
-                </a:solidFill>
-                <a:latin typeface="Arial" panose="020B0604020202020204" pitchFamily="34" charset="0"/>
-              </a:defRPr>
-            </a:lvl4pPr>
-            <a:lvl5pPr marL="2057400" indent="-228600">
-              <a:spcBef>
-                <a:spcPct val="20000"/>
-              </a:spcBef>
-              <a:buChar char="»"/>
-              <a:defRPr sz="2000">
-                <a:solidFill>
-                  <a:schemeClr val="tx1"/>
-                </a:solidFill>
-                <a:latin typeface="Arial" panose="020B0604020202020204" pitchFamily="34" charset="0"/>
-              </a:defRPr>
-            </a:lvl5pPr>
-            <a:lvl6pPr marL="2514600" indent="-228600" eaLnBrk="0" fontAlgn="base" hangingPunct="0">
-              <a:spcBef>
-                <a:spcPct val="20000"/>
-              </a:spcBef>
-              <a:spcAft>
-                <a:spcPct val="0"/>
-              </a:spcAft>
-              <a:buChar char="»"/>
-              <a:defRPr sz="2000">
-                <a:solidFill>
-                  <a:schemeClr val="tx1"/>
-                </a:solidFill>
-                <a:latin typeface="Arial" panose="020B0604020202020204" pitchFamily="34" charset="0"/>
-              </a:defRPr>
-            </a:lvl6pPr>
-            <a:lvl7pPr marL="2971800" indent="-228600" eaLnBrk="0" fontAlgn="base" hangingPunct="0">
-              <a:spcBef>
-                <a:spcPct val="20000"/>
-              </a:spcBef>
-              <a:spcAft>
-                <a:spcPct val="0"/>
-              </a:spcAft>
-              <a:buChar char="»"/>
-              <a:defRPr sz="2000">
-                <a:solidFill>
-                  <a:schemeClr val="tx1"/>
-                </a:solidFill>
-                <a:latin typeface="Arial" panose="020B0604020202020204" pitchFamily="34" charset="0"/>
-              </a:defRPr>
-            </a:lvl7pPr>
-            <a:lvl8pPr marL="3429000" indent="-228600" eaLnBrk="0" fontAlgn="base" hangingPunct="0">
-              <a:spcBef>
-                <a:spcPct val="20000"/>
-              </a:spcBef>
-              <a:spcAft>
-                <a:spcPct val="0"/>
-              </a:spcAft>
-              <a:buChar char="»"/>
-              <a:defRPr sz="2000">
-                <a:solidFill>
-                  <a:schemeClr val="tx1"/>
-                </a:solidFill>
-                <a:latin typeface="Arial" panose="020B0604020202020204" pitchFamily="34" charset="0"/>
-              </a:defRPr>
-            </a:lvl8pPr>
-            <a:lvl9pPr marL="3886200" indent="-228600" eaLnBrk="0" fontAlgn="base" hangingPunct="0">
-              <a:spcBef>
-                <a:spcPct val="20000"/>
-              </a:spcBef>
-              <a:spcAft>
-                <a:spcPct val="0"/>
-              </a:spcAft>
-              <a:buChar char="»"/>
-              <a:defRPr sz="2000">
-                <a:solidFill>
-                  <a:schemeClr val="tx1"/>
-                </a:solidFill>
-                <a:latin typeface="Arial" panose="020B0604020202020204" pitchFamily="34" charset="0"/>
-              </a:defRPr>
-            </a:lvl9pPr>
-          </a:lstStyle>
-          <a:p>
-            <a:pPr algn="ctr" eaLnBrk="1" hangingPunct="1">
-              <a:spcBef>
-                <a:spcPct val="0"/>
-              </a:spcBef>
-              <a:buFontTx/>
-              <a:buNone/>
-            </a:pPr>
-            <a:r>
-              <a:rPr lang="pt-BR" altLang="pt-BR" sz="5600" b="1" dirty="0">
-                <a:latin typeface="Arial Black" panose="020B0A04020102020204" pitchFamily="34" charset="0"/>
-              </a:rPr>
-              <a:t>NOME</a:t>
-            </a:r>
-          </a:p>
-          <a:p>
-            <a:pPr algn="ctr" eaLnBrk="1" hangingPunct="1">
-              <a:spcBef>
-                <a:spcPct val="0"/>
-              </a:spcBef>
-              <a:buFontTx/>
-              <a:buNone/>
-            </a:pPr>
-            <a:r>
-              <a:rPr lang="pt-BR" altLang="pt-BR" sz="4000" b="1" dirty="0">
-                <a:latin typeface="Arial Black" panose="020B0A04020102020204" pitchFamily="34" charset="0"/>
-              </a:rPr>
-              <a:t>CARGO</a:t>
             </a:r>
           </a:p>
         </p:txBody>
@@ -4828,6 +4609,951 @@
           </a:extLst>
         </p:spPr>
       </p:pic>
+      <p:sp>
+        <p:nvSpPr>
+          <p:cNvPr id="4" name="Text Box 9">
+            <a:extLst>
+              <a:ext uri="{FF2B5EF4-FFF2-40B4-BE49-F238E27FC236}">
+                <a16:creationId xmlns:a16="http://schemas.microsoft.com/office/drawing/2014/main" id="{2EA6D9E3-6B27-ED00-E8F9-3786445DB311}"/>
+              </a:ext>
+            </a:extLst>
+          </p:cNvPr>
+          <p:cNvSpPr txBox="1">
+            <a:spLocks noChangeArrowheads="1"/>
+          </p:cNvSpPr>
+          <p:nvPr/>
+        </p:nvSpPr>
+        <p:spPr bwMode="auto">
+          <a:xfrm>
+            <a:off x="-15876" y="5184689"/>
+            <a:ext cx="9921875" cy="707872"/>
+          </a:xfrm>
+          <a:prstGeom prst="rect">
+            <a:avLst/>
+          </a:prstGeom>
+          <a:noFill/>
+          <a:ln>
+            <a:noFill/>
+          </a:ln>
+          <a:extLst>
+            <a:ext uri="{909E8E84-426E-40DD-AFC4-6F175D3DCCD1}">
+              <a14:hiddenFill xmlns:a14="http://schemas.microsoft.com/office/drawing/2010/main">
+                <a:solidFill>
+                  <a:srgbClr val="FFFFFF"/>
+                </a:solidFill>
+              </a14:hiddenFill>
+            </a:ext>
+            <a:ext uri="{91240B29-F687-4F45-9708-019B960494DF}">
+              <a14:hiddenLine xmlns:a14="http://schemas.microsoft.com/office/drawing/2010/main" w="9525">
+                <a:solidFill>
+                  <a:srgbClr val="000000"/>
+                </a:solidFill>
+                <a:miter lim="800000"/>
+                <a:headEnd/>
+                <a:tailEnd/>
+              </a14:hiddenLine>
+            </a:ext>
+          </a:extLst>
+        </p:spPr>
+        <p:txBody>
+          <a:bodyPr lIns="91426" tIns="45713" rIns="91426" bIns="45713">
+            <a:spAutoFit/>
+          </a:bodyPr>
+          <a:lstStyle>
+            <a:lvl1pPr>
+              <a:spcBef>
+                <a:spcPct val="20000"/>
+              </a:spcBef>
+              <a:buChar char="•"/>
+              <a:defRPr sz="3200">
+                <a:solidFill>
+                  <a:schemeClr val="tx1"/>
+                </a:solidFill>
+                <a:latin typeface="Arial" panose="020B0604020202020204" pitchFamily="34" charset="0"/>
+              </a:defRPr>
+            </a:lvl1pPr>
+            <a:lvl2pPr marL="742950" indent="-285750">
+              <a:spcBef>
+                <a:spcPct val="20000"/>
+              </a:spcBef>
+              <a:buChar char="–"/>
+              <a:defRPr sz="2800">
+                <a:solidFill>
+                  <a:schemeClr val="tx1"/>
+                </a:solidFill>
+                <a:latin typeface="Arial" panose="020B0604020202020204" pitchFamily="34" charset="0"/>
+              </a:defRPr>
+            </a:lvl2pPr>
+            <a:lvl3pPr marL="1143000" indent="-228600">
+              <a:spcBef>
+                <a:spcPct val="20000"/>
+              </a:spcBef>
+              <a:buChar char="•"/>
+              <a:defRPr sz="2400">
+                <a:solidFill>
+                  <a:schemeClr val="tx1"/>
+                </a:solidFill>
+                <a:latin typeface="Arial" panose="020B0604020202020204" pitchFamily="34" charset="0"/>
+              </a:defRPr>
+            </a:lvl3pPr>
+            <a:lvl4pPr marL="1600200" indent="-228600">
+              <a:spcBef>
+                <a:spcPct val="20000"/>
+              </a:spcBef>
+              <a:buChar char="–"/>
+              <a:defRPr sz="2000">
+                <a:solidFill>
+                  <a:schemeClr val="tx1"/>
+                </a:solidFill>
+                <a:latin typeface="Arial" panose="020B0604020202020204" pitchFamily="34" charset="0"/>
+              </a:defRPr>
+            </a:lvl4pPr>
+            <a:lvl5pPr marL="2057400" indent="-228600">
+              <a:spcBef>
+                <a:spcPct val="20000"/>
+              </a:spcBef>
+              <a:buChar char="»"/>
+              <a:defRPr sz="2000">
+                <a:solidFill>
+                  <a:schemeClr val="tx1"/>
+                </a:solidFill>
+                <a:latin typeface="Arial" panose="020B0604020202020204" pitchFamily="34" charset="0"/>
+              </a:defRPr>
+            </a:lvl5pPr>
+            <a:lvl6pPr marL="2514600" indent="-228600" eaLnBrk="0" fontAlgn="base" hangingPunct="0">
+              <a:spcBef>
+                <a:spcPct val="20000"/>
+              </a:spcBef>
+              <a:spcAft>
+                <a:spcPct val="0"/>
+              </a:spcAft>
+              <a:buChar char="»"/>
+              <a:defRPr sz="2000">
+                <a:solidFill>
+                  <a:schemeClr val="tx1"/>
+                </a:solidFill>
+                <a:latin typeface="Arial" panose="020B0604020202020204" pitchFamily="34" charset="0"/>
+              </a:defRPr>
+            </a:lvl6pPr>
+            <a:lvl7pPr marL="2971800" indent="-228600" eaLnBrk="0" fontAlgn="base" hangingPunct="0">
+              <a:spcBef>
+                <a:spcPct val="20000"/>
+              </a:spcBef>
+              <a:spcAft>
+                <a:spcPct val="0"/>
+              </a:spcAft>
+              <a:buChar char="»"/>
+              <a:defRPr sz="2000">
+                <a:solidFill>
+                  <a:schemeClr val="tx1"/>
+                </a:solidFill>
+                <a:latin typeface="Arial" panose="020B0604020202020204" pitchFamily="34" charset="0"/>
+              </a:defRPr>
+            </a:lvl7pPr>
+            <a:lvl8pPr marL="3429000" indent="-228600" eaLnBrk="0" fontAlgn="base" hangingPunct="0">
+              <a:spcBef>
+                <a:spcPct val="20000"/>
+              </a:spcBef>
+              <a:spcAft>
+                <a:spcPct val="0"/>
+              </a:spcAft>
+              <a:buChar char="»"/>
+              <a:defRPr sz="2000">
+                <a:solidFill>
+                  <a:schemeClr val="tx1"/>
+                </a:solidFill>
+                <a:latin typeface="Arial" panose="020B0604020202020204" pitchFamily="34" charset="0"/>
+              </a:defRPr>
+            </a:lvl8pPr>
+            <a:lvl9pPr marL="3886200" indent="-228600" eaLnBrk="0" fontAlgn="base" hangingPunct="0">
+              <a:spcBef>
+                <a:spcPct val="20000"/>
+              </a:spcBef>
+              <a:spcAft>
+                <a:spcPct val="0"/>
+              </a:spcAft>
+              <a:buChar char="»"/>
+              <a:defRPr sz="2000">
+                <a:solidFill>
+                  <a:schemeClr val="tx1"/>
+                </a:solidFill>
+                <a:latin typeface="Arial" panose="020B0604020202020204" pitchFamily="34" charset="0"/>
+              </a:defRPr>
+            </a:lvl9pPr>
+          </a:lstStyle>
+          <a:p>
+            <a:pPr algn="ctr" eaLnBrk="1" hangingPunct="1">
+              <a:spcBef>
+                <a:spcPct val="0"/>
+              </a:spcBef>
+              <a:buFontTx/>
+              <a:buNone/>
+            </a:pPr>
+            <a:r>
+              <a:rPr lang="pt-BR" altLang="pt-BR" sz="4000" b="1" dirty="0">
+                <a:latin typeface="Arial Black" panose="020B0A04020102020204" pitchFamily="34" charset="0"/>
+              </a:rPr>
+              <a:t>CARGO</a:t>
+            </a:r>
+          </a:p>
+        </p:txBody>
+      </p:sp>
+      <p:sp>
+        <p:nvSpPr>
+          <p:cNvPr id="8" name="Text Box 9">
+            <a:extLst>
+              <a:ext uri="{FF2B5EF4-FFF2-40B4-BE49-F238E27FC236}">
+                <a16:creationId xmlns:a16="http://schemas.microsoft.com/office/drawing/2014/main" id="{61F04680-D62A-7DE1-395E-620CEFCA605A}"/>
+              </a:ext>
+            </a:extLst>
+          </p:cNvPr>
+          <p:cNvSpPr txBox="1">
+            <a:spLocks noChangeArrowheads="1"/>
+          </p:cNvSpPr>
+          <p:nvPr/>
+        </p:nvSpPr>
+        <p:spPr bwMode="auto">
+          <a:xfrm>
+            <a:off x="-1" y="5726909"/>
+            <a:ext cx="9921875" cy="707872"/>
+          </a:xfrm>
+          <a:prstGeom prst="rect">
+            <a:avLst/>
+          </a:prstGeom>
+          <a:noFill/>
+          <a:ln>
+            <a:noFill/>
+          </a:ln>
+          <a:extLst>
+            <a:ext uri="{909E8E84-426E-40DD-AFC4-6F175D3DCCD1}">
+              <a14:hiddenFill xmlns:a14="http://schemas.microsoft.com/office/drawing/2010/main">
+                <a:solidFill>
+                  <a:srgbClr val="FFFFFF"/>
+                </a:solidFill>
+              </a14:hiddenFill>
+            </a:ext>
+            <a:ext uri="{91240B29-F687-4F45-9708-019B960494DF}">
+              <a14:hiddenLine xmlns:a14="http://schemas.microsoft.com/office/drawing/2010/main" w="9525">
+                <a:solidFill>
+                  <a:srgbClr val="000000"/>
+                </a:solidFill>
+                <a:miter lim="800000"/>
+                <a:headEnd/>
+                <a:tailEnd/>
+              </a14:hiddenLine>
+            </a:ext>
+          </a:extLst>
+        </p:spPr>
+        <p:txBody>
+          <a:bodyPr lIns="91426" tIns="45713" rIns="91426" bIns="45713">
+            <a:spAutoFit/>
+          </a:bodyPr>
+          <a:lstStyle>
+            <a:lvl1pPr>
+              <a:spcBef>
+                <a:spcPct val="20000"/>
+              </a:spcBef>
+              <a:buChar char="•"/>
+              <a:defRPr sz="3200">
+                <a:solidFill>
+                  <a:schemeClr val="tx1"/>
+                </a:solidFill>
+                <a:latin typeface="Arial" panose="020B0604020202020204" pitchFamily="34" charset="0"/>
+              </a:defRPr>
+            </a:lvl1pPr>
+            <a:lvl2pPr marL="742950" indent="-285750">
+              <a:spcBef>
+                <a:spcPct val="20000"/>
+              </a:spcBef>
+              <a:buChar char="–"/>
+              <a:defRPr sz="2800">
+                <a:solidFill>
+                  <a:schemeClr val="tx1"/>
+                </a:solidFill>
+                <a:latin typeface="Arial" panose="020B0604020202020204" pitchFamily="34" charset="0"/>
+              </a:defRPr>
+            </a:lvl2pPr>
+            <a:lvl3pPr marL="1143000" indent="-228600">
+              <a:spcBef>
+                <a:spcPct val="20000"/>
+              </a:spcBef>
+              <a:buChar char="•"/>
+              <a:defRPr sz="2400">
+                <a:solidFill>
+                  <a:schemeClr val="tx1"/>
+                </a:solidFill>
+                <a:latin typeface="Arial" panose="020B0604020202020204" pitchFamily="34" charset="0"/>
+              </a:defRPr>
+            </a:lvl3pPr>
+            <a:lvl4pPr marL="1600200" indent="-228600">
+              <a:spcBef>
+                <a:spcPct val="20000"/>
+              </a:spcBef>
+              <a:buChar char="–"/>
+              <a:defRPr sz="2000">
+                <a:solidFill>
+                  <a:schemeClr val="tx1"/>
+                </a:solidFill>
+                <a:latin typeface="Arial" panose="020B0604020202020204" pitchFamily="34" charset="0"/>
+              </a:defRPr>
+            </a:lvl4pPr>
+            <a:lvl5pPr marL="2057400" indent="-228600">
+              <a:spcBef>
+                <a:spcPct val="20000"/>
+              </a:spcBef>
+              <a:buChar char="»"/>
+              <a:defRPr sz="2000">
+                <a:solidFill>
+                  <a:schemeClr val="tx1"/>
+                </a:solidFill>
+                <a:latin typeface="Arial" panose="020B0604020202020204" pitchFamily="34" charset="0"/>
+              </a:defRPr>
+            </a:lvl5pPr>
+            <a:lvl6pPr marL="2514600" indent="-228600" eaLnBrk="0" fontAlgn="base" hangingPunct="0">
+              <a:spcBef>
+                <a:spcPct val="20000"/>
+              </a:spcBef>
+              <a:spcAft>
+                <a:spcPct val="0"/>
+              </a:spcAft>
+              <a:buChar char="»"/>
+              <a:defRPr sz="2000">
+                <a:solidFill>
+                  <a:schemeClr val="tx1"/>
+                </a:solidFill>
+                <a:latin typeface="Arial" panose="020B0604020202020204" pitchFamily="34" charset="0"/>
+              </a:defRPr>
+            </a:lvl6pPr>
+            <a:lvl7pPr marL="2971800" indent="-228600" eaLnBrk="0" fontAlgn="base" hangingPunct="0">
+              <a:spcBef>
+                <a:spcPct val="20000"/>
+              </a:spcBef>
+              <a:spcAft>
+                <a:spcPct val="0"/>
+              </a:spcAft>
+              <a:buChar char="»"/>
+              <a:defRPr sz="2000">
+                <a:solidFill>
+                  <a:schemeClr val="tx1"/>
+                </a:solidFill>
+                <a:latin typeface="Arial" panose="020B0604020202020204" pitchFamily="34" charset="0"/>
+              </a:defRPr>
+            </a:lvl7pPr>
+            <a:lvl8pPr marL="3429000" indent="-228600" eaLnBrk="0" fontAlgn="base" hangingPunct="0">
+              <a:spcBef>
+                <a:spcPct val="20000"/>
+              </a:spcBef>
+              <a:spcAft>
+                <a:spcPct val="0"/>
+              </a:spcAft>
+              <a:buChar char="»"/>
+              <a:defRPr sz="2000">
+                <a:solidFill>
+                  <a:schemeClr val="tx1"/>
+                </a:solidFill>
+                <a:latin typeface="Arial" panose="020B0604020202020204" pitchFamily="34" charset="0"/>
+              </a:defRPr>
+            </a:lvl8pPr>
+            <a:lvl9pPr marL="3886200" indent="-228600" eaLnBrk="0" fontAlgn="base" hangingPunct="0">
+              <a:spcBef>
+                <a:spcPct val="20000"/>
+              </a:spcBef>
+              <a:spcAft>
+                <a:spcPct val="0"/>
+              </a:spcAft>
+              <a:buChar char="»"/>
+              <a:defRPr sz="2000">
+                <a:solidFill>
+                  <a:schemeClr val="tx1"/>
+                </a:solidFill>
+                <a:latin typeface="Arial" panose="020B0604020202020204" pitchFamily="34" charset="0"/>
+              </a:defRPr>
+            </a:lvl9pPr>
+          </a:lstStyle>
+          <a:p>
+            <a:pPr algn="ctr" eaLnBrk="1" hangingPunct="1">
+              <a:spcBef>
+                <a:spcPct val="0"/>
+              </a:spcBef>
+              <a:buFontTx/>
+              <a:buNone/>
+            </a:pPr>
+            <a:r>
+              <a:rPr lang="pt-BR" altLang="pt-BR" sz="4000" b="1" dirty="0">
+                <a:latin typeface="Arial Black" panose="020B0A04020102020204" pitchFamily="34" charset="0"/>
+              </a:rPr>
+              <a:t>EMPRESA</a:t>
+            </a:r>
+          </a:p>
+        </p:txBody>
+      </p:sp>
+      <p:sp>
+        <p:nvSpPr>
+          <p:cNvPr id="10" name="Text Box 9">
+            <a:extLst>
+              <a:ext uri="{FF2B5EF4-FFF2-40B4-BE49-F238E27FC236}">
+                <a16:creationId xmlns:a16="http://schemas.microsoft.com/office/drawing/2014/main" id="{FBE90B7F-7B83-D1CB-C307-2F4EB9DC5440}"/>
+              </a:ext>
+            </a:extLst>
+          </p:cNvPr>
+          <p:cNvSpPr txBox="1">
+            <a:spLocks noChangeArrowheads="1"/>
+          </p:cNvSpPr>
+          <p:nvPr/>
+        </p:nvSpPr>
+        <p:spPr bwMode="auto">
+          <a:xfrm flipV="1">
+            <a:off x="-15876" y="360859"/>
+            <a:ext cx="9921875" cy="707872"/>
+          </a:xfrm>
+          <a:prstGeom prst="rect">
+            <a:avLst/>
+          </a:prstGeom>
+          <a:noFill/>
+          <a:ln>
+            <a:noFill/>
+          </a:ln>
+          <a:extLst>
+            <a:ext uri="{909E8E84-426E-40DD-AFC4-6F175D3DCCD1}">
+              <a14:hiddenFill xmlns:a14="http://schemas.microsoft.com/office/drawing/2010/main">
+                <a:solidFill>
+                  <a:srgbClr val="FFFFFF"/>
+                </a:solidFill>
+              </a14:hiddenFill>
+            </a:ext>
+            <a:ext uri="{91240B29-F687-4F45-9708-019B960494DF}">
+              <a14:hiddenLine xmlns:a14="http://schemas.microsoft.com/office/drawing/2010/main" w="9525">
+                <a:solidFill>
+                  <a:srgbClr val="000000"/>
+                </a:solidFill>
+                <a:miter lim="800000"/>
+                <a:headEnd/>
+                <a:tailEnd/>
+              </a14:hiddenLine>
+            </a:ext>
+          </a:extLst>
+        </p:spPr>
+        <p:txBody>
+          <a:bodyPr lIns="91426" tIns="45713" rIns="91426" bIns="45713">
+            <a:spAutoFit/>
+          </a:bodyPr>
+          <a:lstStyle>
+            <a:lvl1pPr>
+              <a:spcBef>
+                <a:spcPct val="20000"/>
+              </a:spcBef>
+              <a:buChar char="•"/>
+              <a:defRPr sz="3200">
+                <a:solidFill>
+                  <a:schemeClr val="tx1"/>
+                </a:solidFill>
+                <a:latin typeface="Arial" panose="020B0604020202020204" pitchFamily="34" charset="0"/>
+              </a:defRPr>
+            </a:lvl1pPr>
+            <a:lvl2pPr marL="742950" indent="-285750">
+              <a:spcBef>
+                <a:spcPct val="20000"/>
+              </a:spcBef>
+              <a:buChar char="–"/>
+              <a:defRPr sz="2800">
+                <a:solidFill>
+                  <a:schemeClr val="tx1"/>
+                </a:solidFill>
+                <a:latin typeface="Arial" panose="020B0604020202020204" pitchFamily="34" charset="0"/>
+              </a:defRPr>
+            </a:lvl2pPr>
+            <a:lvl3pPr marL="1143000" indent="-228600">
+              <a:spcBef>
+                <a:spcPct val="20000"/>
+              </a:spcBef>
+              <a:buChar char="•"/>
+              <a:defRPr sz="2400">
+                <a:solidFill>
+                  <a:schemeClr val="tx1"/>
+                </a:solidFill>
+                <a:latin typeface="Arial" panose="020B0604020202020204" pitchFamily="34" charset="0"/>
+              </a:defRPr>
+            </a:lvl3pPr>
+            <a:lvl4pPr marL="1600200" indent="-228600">
+              <a:spcBef>
+                <a:spcPct val="20000"/>
+              </a:spcBef>
+              <a:buChar char="–"/>
+              <a:defRPr sz="2000">
+                <a:solidFill>
+                  <a:schemeClr val="tx1"/>
+                </a:solidFill>
+                <a:latin typeface="Arial" panose="020B0604020202020204" pitchFamily="34" charset="0"/>
+              </a:defRPr>
+            </a:lvl4pPr>
+            <a:lvl5pPr marL="2057400" indent="-228600">
+              <a:spcBef>
+                <a:spcPct val="20000"/>
+              </a:spcBef>
+              <a:buChar char="»"/>
+              <a:defRPr sz="2000">
+                <a:solidFill>
+                  <a:schemeClr val="tx1"/>
+                </a:solidFill>
+                <a:latin typeface="Arial" panose="020B0604020202020204" pitchFamily="34" charset="0"/>
+              </a:defRPr>
+            </a:lvl5pPr>
+            <a:lvl6pPr marL="2514600" indent="-228600" eaLnBrk="0" fontAlgn="base" hangingPunct="0">
+              <a:spcBef>
+                <a:spcPct val="20000"/>
+              </a:spcBef>
+              <a:spcAft>
+                <a:spcPct val="0"/>
+              </a:spcAft>
+              <a:buChar char="»"/>
+              <a:defRPr sz="2000">
+                <a:solidFill>
+                  <a:schemeClr val="tx1"/>
+                </a:solidFill>
+                <a:latin typeface="Arial" panose="020B0604020202020204" pitchFamily="34" charset="0"/>
+              </a:defRPr>
+            </a:lvl6pPr>
+            <a:lvl7pPr marL="2971800" indent="-228600" eaLnBrk="0" fontAlgn="base" hangingPunct="0">
+              <a:spcBef>
+                <a:spcPct val="20000"/>
+              </a:spcBef>
+              <a:spcAft>
+                <a:spcPct val="0"/>
+              </a:spcAft>
+              <a:buChar char="»"/>
+              <a:defRPr sz="2000">
+                <a:solidFill>
+                  <a:schemeClr val="tx1"/>
+                </a:solidFill>
+                <a:latin typeface="Arial" panose="020B0604020202020204" pitchFamily="34" charset="0"/>
+              </a:defRPr>
+            </a:lvl7pPr>
+            <a:lvl8pPr marL="3429000" indent="-228600" eaLnBrk="0" fontAlgn="base" hangingPunct="0">
+              <a:spcBef>
+                <a:spcPct val="20000"/>
+              </a:spcBef>
+              <a:spcAft>
+                <a:spcPct val="0"/>
+              </a:spcAft>
+              <a:buChar char="»"/>
+              <a:defRPr sz="2000">
+                <a:solidFill>
+                  <a:schemeClr val="tx1"/>
+                </a:solidFill>
+                <a:latin typeface="Arial" panose="020B0604020202020204" pitchFamily="34" charset="0"/>
+              </a:defRPr>
+            </a:lvl8pPr>
+            <a:lvl9pPr marL="3886200" indent="-228600" eaLnBrk="0" fontAlgn="base" hangingPunct="0">
+              <a:spcBef>
+                <a:spcPct val="20000"/>
+              </a:spcBef>
+              <a:spcAft>
+                <a:spcPct val="0"/>
+              </a:spcAft>
+              <a:buChar char="»"/>
+              <a:defRPr sz="2000">
+                <a:solidFill>
+                  <a:schemeClr val="tx1"/>
+                </a:solidFill>
+                <a:latin typeface="Arial" panose="020B0604020202020204" pitchFamily="34" charset="0"/>
+              </a:defRPr>
+            </a:lvl9pPr>
+          </a:lstStyle>
+          <a:p>
+            <a:pPr algn="ctr" eaLnBrk="1" hangingPunct="1">
+              <a:spcBef>
+                <a:spcPct val="0"/>
+              </a:spcBef>
+              <a:buFontTx/>
+              <a:buNone/>
+            </a:pPr>
+            <a:r>
+              <a:rPr lang="pt-BR" altLang="pt-BR" sz="4000" b="1" dirty="0">
+                <a:latin typeface="Arial Black" panose="020B0A04020102020204" pitchFamily="34" charset="0"/>
+              </a:rPr>
+              <a:t>EMPRESA</a:t>
+            </a:r>
+          </a:p>
+        </p:txBody>
+      </p:sp>
+      <p:sp>
+        <p:nvSpPr>
+          <p:cNvPr id="12" name="Text Box 9">
+            <a:extLst>
+              <a:ext uri="{FF2B5EF4-FFF2-40B4-BE49-F238E27FC236}">
+                <a16:creationId xmlns:a16="http://schemas.microsoft.com/office/drawing/2014/main" id="{30D8F770-B6F6-2A75-E211-671EA3E01BAF}"/>
+              </a:ext>
+            </a:extLst>
+          </p:cNvPr>
+          <p:cNvSpPr txBox="1">
+            <a:spLocks noChangeArrowheads="1"/>
+          </p:cNvSpPr>
+          <p:nvPr/>
+        </p:nvSpPr>
+        <p:spPr bwMode="auto">
+          <a:xfrm flipV="1">
+            <a:off x="-15876" y="930692"/>
+            <a:ext cx="9921875" cy="707872"/>
+          </a:xfrm>
+          <a:prstGeom prst="rect">
+            <a:avLst/>
+          </a:prstGeom>
+          <a:noFill/>
+          <a:ln>
+            <a:noFill/>
+          </a:ln>
+          <a:extLst>
+            <a:ext uri="{909E8E84-426E-40DD-AFC4-6F175D3DCCD1}">
+              <a14:hiddenFill xmlns:a14="http://schemas.microsoft.com/office/drawing/2010/main">
+                <a:solidFill>
+                  <a:srgbClr val="FFFFFF"/>
+                </a:solidFill>
+              </a14:hiddenFill>
+            </a:ext>
+            <a:ext uri="{91240B29-F687-4F45-9708-019B960494DF}">
+              <a14:hiddenLine xmlns:a14="http://schemas.microsoft.com/office/drawing/2010/main" w="9525">
+                <a:solidFill>
+                  <a:srgbClr val="000000"/>
+                </a:solidFill>
+                <a:miter lim="800000"/>
+                <a:headEnd/>
+                <a:tailEnd/>
+              </a14:hiddenLine>
+            </a:ext>
+          </a:extLst>
+        </p:spPr>
+        <p:txBody>
+          <a:bodyPr lIns="91426" tIns="45713" rIns="91426" bIns="45713">
+            <a:spAutoFit/>
+          </a:bodyPr>
+          <a:lstStyle>
+            <a:lvl1pPr>
+              <a:spcBef>
+                <a:spcPct val="20000"/>
+              </a:spcBef>
+              <a:buChar char="•"/>
+              <a:defRPr sz="3200">
+                <a:solidFill>
+                  <a:schemeClr val="tx1"/>
+                </a:solidFill>
+                <a:latin typeface="Arial" panose="020B0604020202020204" pitchFamily="34" charset="0"/>
+              </a:defRPr>
+            </a:lvl1pPr>
+            <a:lvl2pPr marL="742950" indent="-285750">
+              <a:spcBef>
+                <a:spcPct val="20000"/>
+              </a:spcBef>
+              <a:buChar char="–"/>
+              <a:defRPr sz="2800">
+                <a:solidFill>
+                  <a:schemeClr val="tx1"/>
+                </a:solidFill>
+                <a:latin typeface="Arial" panose="020B0604020202020204" pitchFamily="34" charset="0"/>
+              </a:defRPr>
+            </a:lvl2pPr>
+            <a:lvl3pPr marL="1143000" indent="-228600">
+              <a:spcBef>
+                <a:spcPct val="20000"/>
+              </a:spcBef>
+              <a:buChar char="•"/>
+              <a:defRPr sz="2400">
+                <a:solidFill>
+                  <a:schemeClr val="tx1"/>
+                </a:solidFill>
+                <a:latin typeface="Arial" panose="020B0604020202020204" pitchFamily="34" charset="0"/>
+              </a:defRPr>
+            </a:lvl3pPr>
+            <a:lvl4pPr marL="1600200" indent="-228600">
+              <a:spcBef>
+                <a:spcPct val="20000"/>
+              </a:spcBef>
+              <a:buChar char="–"/>
+              <a:defRPr sz="2000">
+                <a:solidFill>
+                  <a:schemeClr val="tx1"/>
+                </a:solidFill>
+                <a:latin typeface="Arial" panose="020B0604020202020204" pitchFamily="34" charset="0"/>
+              </a:defRPr>
+            </a:lvl4pPr>
+            <a:lvl5pPr marL="2057400" indent="-228600">
+              <a:spcBef>
+                <a:spcPct val="20000"/>
+              </a:spcBef>
+              <a:buChar char="»"/>
+              <a:defRPr sz="2000">
+                <a:solidFill>
+                  <a:schemeClr val="tx1"/>
+                </a:solidFill>
+                <a:latin typeface="Arial" panose="020B0604020202020204" pitchFamily="34" charset="0"/>
+              </a:defRPr>
+            </a:lvl5pPr>
+            <a:lvl6pPr marL="2514600" indent="-228600" eaLnBrk="0" fontAlgn="base" hangingPunct="0">
+              <a:spcBef>
+                <a:spcPct val="20000"/>
+              </a:spcBef>
+              <a:spcAft>
+                <a:spcPct val="0"/>
+              </a:spcAft>
+              <a:buChar char="»"/>
+              <a:defRPr sz="2000">
+                <a:solidFill>
+                  <a:schemeClr val="tx1"/>
+                </a:solidFill>
+                <a:latin typeface="Arial" panose="020B0604020202020204" pitchFamily="34" charset="0"/>
+              </a:defRPr>
+            </a:lvl6pPr>
+            <a:lvl7pPr marL="2971800" indent="-228600" eaLnBrk="0" fontAlgn="base" hangingPunct="0">
+              <a:spcBef>
+                <a:spcPct val="20000"/>
+              </a:spcBef>
+              <a:spcAft>
+                <a:spcPct val="0"/>
+              </a:spcAft>
+              <a:buChar char="»"/>
+              <a:defRPr sz="2000">
+                <a:solidFill>
+                  <a:schemeClr val="tx1"/>
+                </a:solidFill>
+                <a:latin typeface="Arial" panose="020B0604020202020204" pitchFamily="34" charset="0"/>
+              </a:defRPr>
+            </a:lvl7pPr>
+            <a:lvl8pPr marL="3429000" indent="-228600" eaLnBrk="0" fontAlgn="base" hangingPunct="0">
+              <a:spcBef>
+                <a:spcPct val="20000"/>
+              </a:spcBef>
+              <a:spcAft>
+                <a:spcPct val="0"/>
+              </a:spcAft>
+              <a:buChar char="»"/>
+              <a:defRPr sz="2000">
+                <a:solidFill>
+                  <a:schemeClr val="tx1"/>
+                </a:solidFill>
+                <a:latin typeface="Arial" panose="020B0604020202020204" pitchFamily="34" charset="0"/>
+              </a:defRPr>
+            </a:lvl8pPr>
+            <a:lvl9pPr marL="3886200" indent="-228600" eaLnBrk="0" fontAlgn="base" hangingPunct="0">
+              <a:spcBef>
+                <a:spcPct val="20000"/>
+              </a:spcBef>
+              <a:spcAft>
+                <a:spcPct val="0"/>
+              </a:spcAft>
+              <a:buChar char="»"/>
+              <a:defRPr sz="2000">
+                <a:solidFill>
+                  <a:schemeClr val="tx1"/>
+                </a:solidFill>
+                <a:latin typeface="Arial" panose="020B0604020202020204" pitchFamily="34" charset="0"/>
+              </a:defRPr>
+            </a:lvl9pPr>
+          </a:lstStyle>
+          <a:p>
+            <a:pPr algn="ctr" eaLnBrk="1" hangingPunct="1">
+              <a:spcBef>
+                <a:spcPct val="0"/>
+              </a:spcBef>
+              <a:buFontTx/>
+              <a:buNone/>
+            </a:pPr>
+            <a:r>
+              <a:rPr lang="pt-BR" altLang="pt-BR" sz="4000" b="1" dirty="0">
+                <a:latin typeface="Arial Black" panose="020B0A04020102020204" pitchFamily="34" charset="0"/>
+              </a:rPr>
+              <a:t>CARGO</a:t>
+            </a:r>
+          </a:p>
+        </p:txBody>
+      </p:sp>
+      <p:sp>
+        <p:nvSpPr>
+          <p:cNvPr id="14" name="Text Box 9">
+            <a:extLst>
+              <a:ext uri="{FF2B5EF4-FFF2-40B4-BE49-F238E27FC236}">
+                <a16:creationId xmlns:a16="http://schemas.microsoft.com/office/drawing/2014/main" id="{779E6A6B-38C1-37A9-BACD-EF6834E7572B}"/>
+              </a:ext>
+            </a:extLst>
+          </p:cNvPr>
+          <p:cNvSpPr txBox="1">
+            <a:spLocks noChangeArrowheads="1"/>
+          </p:cNvSpPr>
+          <p:nvPr/>
+        </p:nvSpPr>
+        <p:spPr bwMode="auto">
+          <a:xfrm flipV="1">
+            <a:off x="-15876" y="1422742"/>
+            <a:ext cx="9921875" cy="954093"/>
+          </a:xfrm>
+          <a:prstGeom prst="rect">
+            <a:avLst/>
+          </a:prstGeom>
+          <a:noFill/>
+          <a:ln>
+            <a:noFill/>
+          </a:ln>
+          <a:extLst>
+            <a:ext uri="{909E8E84-426E-40DD-AFC4-6F175D3DCCD1}">
+              <a14:hiddenFill xmlns:a14="http://schemas.microsoft.com/office/drawing/2010/main">
+                <a:solidFill>
+                  <a:srgbClr val="FFFFFF"/>
+                </a:solidFill>
+              </a14:hiddenFill>
+            </a:ext>
+            <a:ext uri="{91240B29-F687-4F45-9708-019B960494DF}">
+              <a14:hiddenLine xmlns:a14="http://schemas.microsoft.com/office/drawing/2010/main" w="9525">
+                <a:solidFill>
+                  <a:srgbClr val="000000"/>
+                </a:solidFill>
+                <a:miter lim="800000"/>
+                <a:headEnd/>
+                <a:tailEnd/>
+              </a14:hiddenLine>
+            </a:ext>
+          </a:extLst>
+        </p:spPr>
+        <p:txBody>
+          <a:bodyPr lIns="91426" tIns="45713" rIns="91426" bIns="45713">
+            <a:spAutoFit/>
+          </a:bodyPr>
+          <a:lstStyle>
+            <a:lvl1pPr>
+              <a:spcBef>
+                <a:spcPct val="20000"/>
+              </a:spcBef>
+              <a:buChar char="•"/>
+              <a:defRPr sz="3200">
+                <a:solidFill>
+                  <a:schemeClr val="tx1"/>
+                </a:solidFill>
+                <a:latin typeface="Arial" panose="020B0604020202020204" pitchFamily="34" charset="0"/>
+              </a:defRPr>
+            </a:lvl1pPr>
+            <a:lvl2pPr marL="742950" indent="-285750">
+              <a:spcBef>
+                <a:spcPct val="20000"/>
+              </a:spcBef>
+              <a:buChar char="–"/>
+              <a:defRPr sz="2800">
+                <a:solidFill>
+                  <a:schemeClr val="tx1"/>
+                </a:solidFill>
+                <a:latin typeface="Arial" panose="020B0604020202020204" pitchFamily="34" charset="0"/>
+              </a:defRPr>
+            </a:lvl2pPr>
+            <a:lvl3pPr marL="1143000" indent="-228600">
+              <a:spcBef>
+                <a:spcPct val="20000"/>
+              </a:spcBef>
+              <a:buChar char="•"/>
+              <a:defRPr sz="2400">
+                <a:solidFill>
+                  <a:schemeClr val="tx1"/>
+                </a:solidFill>
+                <a:latin typeface="Arial" panose="020B0604020202020204" pitchFamily="34" charset="0"/>
+              </a:defRPr>
+            </a:lvl3pPr>
+            <a:lvl4pPr marL="1600200" indent="-228600">
+              <a:spcBef>
+                <a:spcPct val="20000"/>
+              </a:spcBef>
+              <a:buChar char="–"/>
+              <a:defRPr sz="2000">
+                <a:solidFill>
+                  <a:schemeClr val="tx1"/>
+                </a:solidFill>
+                <a:latin typeface="Arial" panose="020B0604020202020204" pitchFamily="34" charset="0"/>
+              </a:defRPr>
+            </a:lvl4pPr>
+            <a:lvl5pPr marL="2057400" indent="-228600">
+              <a:spcBef>
+                <a:spcPct val="20000"/>
+              </a:spcBef>
+              <a:buChar char="»"/>
+              <a:defRPr sz="2000">
+                <a:solidFill>
+                  <a:schemeClr val="tx1"/>
+                </a:solidFill>
+                <a:latin typeface="Arial" panose="020B0604020202020204" pitchFamily="34" charset="0"/>
+              </a:defRPr>
+            </a:lvl5pPr>
+            <a:lvl6pPr marL="2514600" indent="-228600" eaLnBrk="0" fontAlgn="base" hangingPunct="0">
+              <a:spcBef>
+                <a:spcPct val="20000"/>
+              </a:spcBef>
+              <a:spcAft>
+                <a:spcPct val="0"/>
+              </a:spcAft>
+              <a:buChar char="»"/>
+              <a:defRPr sz="2000">
+                <a:solidFill>
+                  <a:schemeClr val="tx1"/>
+                </a:solidFill>
+                <a:latin typeface="Arial" panose="020B0604020202020204" pitchFamily="34" charset="0"/>
+              </a:defRPr>
+            </a:lvl6pPr>
+            <a:lvl7pPr marL="2971800" indent="-228600" eaLnBrk="0" fontAlgn="base" hangingPunct="0">
+              <a:spcBef>
+                <a:spcPct val="20000"/>
+              </a:spcBef>
+              <a:spcAft>
+                <a:spcPct val="0"/>
+              </a:spcAft>
+              <a:buChar char="»"/>
+              <a:defRPr sz="2000">
+                <a:solidFill>
+                  <a:schemeClr val="tx1"/>
+                </a:solidFill>
+                <a:latin typeface="Arial" panose="020B0604020202020204" pitchFamily="34" charset="0"/>
+              </a:defRPr>
+            </a:lvl7pPr>
+            <a:lvl8pPr marL="3429000" indent="-228600" eaLnBrk="0" fontAlgn="base" hangingPunct="0">
+              <a:spcBef>
+                <a:spcPct val="20000"/>
+              </a:spcBef>
+              <a:spcAft>
+                <a:spcPct val="0"/>
+              </a:spcAft>
+              <a:buChar char="»"/>
+              <a:defRPr sz="2000">
+                <a:solidFill>
+                  <a:schemeClr val="tx1"/>
+                </a:solidFill>
+                <a:latin typeface="Arial" panose="020B0604020202020204" pitchFamily="34" charset="0"/>
+              </a:defRPr>
+            </a:lvl8pPr>
+            <a:lvl9pPr marL="3886200" indent="-228600" eaLnBrk="0" fontAlgn="base" hangingPunct="0">
+              <a:spcBef>
+                <a:spcPct val="20000"/>
+              </a:spcBef>
+              <a:spcAft>
+                <a:spcPct val="0"/>
+              </a:spcAft>
+              <a:buChar char="»"/>
+              <a:defRPr sz="2000">
+                <a:solidFill>
+                  <a:schemeClr val="tx1"/>
+                </a:solidFill>
+                <a:latin typeface="Arial" panose="020B0604020202020204" pitchFamily="34" charset="0"/>
+              </a:defRPr>
+            </a:lvl9pPr>
+          </a:lstStyle>
+          <a:p>
+            <a:pPr algn="ctr" eaLnBrk="1" hangingPunct="1">
+              <a:spcBef>
+                <a:spcPct val="0"/>
+              </a:spcBef>
+              <a:buFontTx/>
+              <a:buNone/>
+            </a:pPr>
+            <a:r>
+              <a:rPr lang="pt-BR" altLang="pt-BR" sz="5600" b="1" dirty="0">
+                <a:latin typeface="Arial Black" panose="020B0A04020102020204" pitchFamily="34" charset="0"/>
+              </a:rPr>
+              <a:t>NOME</a:t>
+            </a:r>
+          </a:p>
+        </p:txBody>
+      </p:sp>
     </p:spTree>
   </p:cSld>
   <p:clrMapOvr>

--- a/templates/30x10.5/cni.pptx
+++ b/templates/30x10.5/cni.pptx
@@ -4989,10 +4989,10 @@
       </p:sp>
       <p:sp>
         <p:nvSpPr>
-          <p:cNvPr id="10" name="Text Box 9">
+          <p:cNvPr id="5" name="Text Box 9">
             <a:extLst>
               <a:ext uri="{FF2B5EF4-FFF2-40B4-BE49-F238E27FC236}">
-                <a16:creationId xmlns:a16="http://schemas.microsoft.com/office/drawing/2014/main" id="{FBE90B7F-7B83-D1CB-C307-2F4EB9DC5440}"/>
+                <a16:creationId xmlns:a16="http://schemas.microsoft.com/office/drawing/2014/main" id="{F1D7BA32-176E-7460-0302-62E39D691E08}"/>
               </a:ext>
             </a:extLst>
           </p:cNvPr>
@@ -5002,8 +5002,197 @@
           <p:nvPr/>
         </p:nvSpPr>
         <p:spPr bwMode="auto">
-          <a:xfrm flipV="1">
-            <a:off x="-15876" y="360859"/>
+          <a:xfrm rot="10800000">
+            <a:off x="-15875" y="236288"/>
+            <a:ext cx="9906000" cy="954093"/>
+          </a:xfrm>
+          <a:prstGeom prst="rect">
+            <a:avLst/>
+          </a:prstGeom>
+          <a:noFill/>
+          <a:ln>
+            <a:noFill/>
+          </a:ln>
+          <a:extLst>
+            <a:ext uri="{909E8E84-426E-40DD-AFC4-6F175D3DCCD1}">
+              <a14:hiddenFill xmlns:a14="http://schemas.microsoft.com/office/drawing/2010/main">
+                <a:solidFill>
+                  <a:srgbClr val="FFFFFF"/>
+                </a:solidFill>
+              </a14:hiddenFill>
+            </a:ext>
+            <a:ext uri="{91240B29-F687-4F45-9708-019B960494DF}">
+              <a14:hiddenLine xmlns:a14="http://schemas.microsoft.com/office/drawing/2010/main" w="9525">
+                <a:solidFill>
+                  <a:srgbClr val="000000"/>
+                </a:solidFill>
+                <a:miter lim="800000"/>
+                <a:headEnd/>
+                <a:tailEnd/>
+              </a14:hiddenLine>
+            </a:ext>
+          </a:extLst>
+        </p:spPr>
+        <p:txBody>
+          <a:bodyPr wrap="square" lIns="91426" tIns="45713" rIns="91426" bIns="45713">
+            <a:spAutoFit/>
+          </a:bodyPr>
+          <a:lstStyle>
+            <a:lvl1pPr>
+              <a:spcBef>
+                <a:spcPct val="20000"/>
+              </a:spcBef>
+              <a:buChar char="•"/>
+              <a:defRPr sz="3200">
+                <a:solidFill>
+                  <a:schemeClr val="tx1"/>
+                </a:solidFill>
+                <a:latin typeface="Arial" panose="020B0604020202020204" pitchFamily="34" charset="0"/>
+              </a:defRPr>
+            </a:lvl1pPr>
+            <a:lvl2pPr marL="742950" indent="-285750">
+              <a:spcBef>
+                <a:spcPct val="20000"/>
+              </a:spcBef>
+              <a:buChar char="–"/>
+              <a:defRPr sz="2800">
+                <a:solidFill>
+                  <a:schemeClr val="tx1"/>
+                </a:solidFill>
+                <a:latin typeface="Arial" panose="020B0604020202020204" pitchFamily="34" charset="0"/>
+              </a:defRPr>
+            </a:lvl2pPr>
+            <a:lvl3pPr marL="1143000" indent="-228600">
+              <a:spcBef>
+                <a:spcPct val="20000"/>
+              </a:spcBef>
+              <a:buChar char="•"/>
+              <a:defRPr sz="2400">
+                <a:solidFill>
+                  <a:schemeClr val="tx1"/>
+                </a:solidFill>
+                <a:latin typeface="Arial" panose="020B0604020202020204" pitchFamily="34" charset="0"/>
+              </a:defRPr>
+            </a:lvl3pPr>
+            <a:lvl4pPr marL="1600200" indent="-228600">
+              <a:spcBef>
+                <a:spcPct val="20000"/>
+              </a:spcBef>
+              <a:buChar char="–"/>
+              <a:defRPr sz="2000">
+                <a:solidFill>
+                  <a:schemeClr val="tx1"/>
+                </a:solidFill>
+                <a:latin typeface="Arial" panose="020B0604020202020204" pitchFamily="34" charset="0"/>
+              </a:defRPr>
+            </a:lvl4pPr>
+            <a:lvl5pPr marL="2057400" indent="-228600">
+              <a:spcBef>
+                <a:spcPct val="20000"/>
+              </a:spcBef>
+              <a:buChar char="»"/>
+              <a:defRPr sz="2000">
+                <a:solidFill>
+                  <a:schemeClr val="tx1"/>
+                </a:solidFill>
+                <a:latin typeface="Arial" panose="020B0604020202020204" pitchFamily="34" charset="0"/>
+              </a:defRPr>
+            </a:lvl5pPr>
+            <a:lvl6pPr marL="2514600" indent="-228600" eaLnBrk="0" fontAlgn="base" hangingPunct="0">
+              <a:spcBef>
+                <a:spcPct val="20000"/>
+              </a:spcBef>
+              <a:spcAft>
+                <a:spcPct val="0"/>
+              </a:spcAft>
+              <a:buChar char="»"/>
+              <a:defRPr sz="2000">
+                <a:solidFill>
+                  <a:schemeClr val="tx1"/>
+                </a:solidFill>
+                <a:latin typeface="Arial" panose="020B0604020202020204" pitchFamily="34" charset="0"/>
+              </a:defRPr>
+            </a:lvl6pPr>
+            <a:lvl7pPr marL="2971800" indent="-228600" eaLnBrk="0" fontAlgn="base" hangingPunct="0">
+              <a:spcBef>
+                <a:spcPct val="20000"/>
+              </a:spcBef>
+              <a:spcAft>
+                <a:spcPct val="0"/>
+              </a:spcAft>
+              <a:buChar char="»"/>
+              <a:defRPr sz="2000">
+                <a:solidFill>
+                  <a:schemeClr val="tx1"/>
+                </a:solidFill>
+                <a:latin typeface="Arial" panose="020B0604020202020204" pitchFamily="34" charset="0"/>
+              </a:defRPr>
+            </a:lvl7pPr>
+            <a:lvl8pPr marL="3429000" indent="-228600" eaLnBrk="0" fontAlgn="base" hangingPunct="0">
+              <a:spcBef>
+                <a:spcPct val="20000"/>
+              </a:spcBef>
+              <a:spcAft>
+                <a:spcPct val="0"/>
+              </a:spcAft>
+              <a:buChar char="»"/>
+              <a:defRPr sz="2000">
+                <a:solidFill>
+                  <a:schemeClr val="tx1"/>
+                </a:solidFill>
+                <a:latin typeface="Arial" panose="020B0604020202020204" pitchFamily="34" charset="0"/>
+              </a:defRPr>
+            </a:lvl8pPr>
+            <a:lvl9pPr marL="3886200" indent="-228600" eaLnBrk="0" fontAlgn="base" hangingPunct="0">
+              <a:spcBef>
+                <a:spcPct val="20000"/>
+              </a:spcBef>
+              <a:spcAft>
+                <a:spcPct val="0"/>
+              </a:spcAft>
+              <a:buChar char="»"/>
+              <a:defRPr sz="2000">
+                <a:solidFill>
+                  <a:schemeClr val="tx1"/>
+                </a:solidFill>
+                <a:latin typeface="Arial" panose="020B0604020202020204" pitchFamily="34" charset="0"/>
+              </a:defRPr>
+            </a:lvl9pPr>
+          </a:lstStyle>
+          <a:p>
+            <a:pPr algn="ctr" eaLnBrk="1" hangingPunct="1">
+              <a:spcBef>
+                <a:spcPct val="0"/>
+              </a:spcBef>
+              <a:buFontTx/>
+              <a:buNone/>
+            </a:pPr>
+            <a:r>
+              <a:rPr lang="pt-BR" altLang="pt-BR" sz="5600" b="1" dirty="0">
+                <a:latin typeface="Arial Black" panose="020B0A04020102020204" pitchFamily="34" charset="0"/>
+              </a:rPr>
+              <a:t>NOME</a:t>
+            </a:r>
+          </a:p>
+        </p:txBody>
+      </p:sp>
+      <p:sp>
+        <p:nvSpPr>
+          <p:cNvPr id="7" name="Text Box 9">
+            <a:extLst>
+              <a:ext uri="{FF2B5EF4-FFF2-40B4-BE49-F238E27FC236}">
+                <a16:creationId xmlns:a16="http://schemas.microsoft.com/office/drawing/2014/main" id="{5BF99797-F8CE-6912-ED50-6B8FC4C536C5}"/>
+              </a:ext>
+            </a:extLst>
+          </p:cNvPr>
+          <p:cNvSpPr txBox="1">
+            <a:spLocks noChangeArrowheads="1"/>
+          </p:cNvSpPr>
+          <p:nvPr/>
+        </p:nvSpPr>
+        <p:spPr bwMode="auto">
+          <a:xfrm rot="10800000">
+            <a:off x="-31751" y="996616"/>
             <a:ext cx="9921875" cy="707872"/>
           </a:xfrm>
           <a:prstGeom prst="rect">
@@ -5171,17 +5360,17 @@
               <a:rPr lang="pt-BR" altLang="pt-BR" sz="4000" b="1" dirty="0">
                 <a:latin typeface="Arial Black" panose="020B0A04020102020204" pitchFamily="34" charset="0"/>
               </a:rPr>
-              <a:t>EMPRESA</a:t>
-            </a:r>
-          </a:p>
-        </p:txBody>
-      </p:sp>
-      <p:sp>
-        <p:nvSpPr>
-          <p:cNvPr id="12" name="Text Box 9">
+              <a:t>CARGO</a:t>
+            </a:r>
+          </a:p>
+        </p:txBody>
+      </p:sp>
+      <p:sp>
+        <p:nvSpPr>
+          <p:cNvPr id="11" name="Text Box 9">
             <a:extLst>
               <a:ext uri="{FF2B5EF4-FFF2-40B4-BE49-F238E27FC236}">
-                <a16:creationId xmlns:a16="http://schemas.microsoft.com/office/drawing/2014/main" id="{30D8F770-B6F6-2A75-E211-671EA3E01BAF}"/>
+                <a16:creationId xmlns:a16="http://schemas.microsoft.com/office/drawing/2014/main" id="{35178476-2575-6BAF-9D6B-DBC14355F63E}"/>
               </a:ext>
             </a:extLst>
           </p:cNvPr>
@@ -5191,8 +5380,8 @@
           <p:nvPr/>
         </p:nvSpPr>
         <p:spPr bwMode="auto">
-          <a:xfrm flipV="1">
-            <a:off x="-15876" y="930692"/>
+          <a:xfrm rot="10800000">
+            <a:off x="-15876" y="1538836"/>
             <a:ext cx="9921875" cy="707872"/>
           </a:xfrm>
           <a:prstGeom prst="rect">
@@ -5360,196 +5549,7 @@
               <a:rPr lang="pt-BR" altLang="pt-BR" sz="4000" b="1" dirty="0">
                 <a:latin typeface="Arial Black" panose="020B0A04020102020204" pitchFamily="34" charset="0"/>
               </a:rPr>
-              <a:t>CARGO</a:t>
-            </a:r>
-          </a:p>
-        </p:txBody>
-      </p:sp>
-      <p:sp>
-        <p:nvSpPr>
-          <p:cNvPr id="14" name="Text Box 9">
-            <a:extLst>
-              <a:ext uri="{FF2B5EF4-FFF2-40B4-BE49-F238E27FC236}">
-                <a16:creationId xmlns:a16="http://schemas.microsoft.com/office/drawing/2014/main" id="{779E6A6B-38C1-37A9-BACD-EF6834E7572B}"/>
-              </a:ext>
-            </a:extLst>
-          </p:cNvPr>
-          <p:cNvSpPr txBox="1">
-            <a:spLocks noChangeArrowheads="1"/>
-          </p:cNvSpPr>
-          <p:nvPr/>
-        </p:nvSpPr>
-        <p:spPr bwMode="auto">
-          <a:xfrm flipV="1">
-            <a:off x="-15876" y="1422742"/>
-            <a:ext cx="9921875" cy="954093"/>
-          </a:xfrm>
-          <a:prstGeom prst="rect">
-            <a:avLst/>
-          </a:prstGeom>
-          <a:noFill/>
-          <a:ln>
-            <a:noFill/>
-          </a:ln>
-          <a:extLst>
-            <a:ext uri="{909E8E84-426E-40DD-AFC4-6F175D3DCCD1}">
-              <a14:hiddenFill xmlns:a14="http://schemas.microsoft.com/office/drawing/2010/main">
-                <a:solidFill>
-                  <a:srgbClr val="FFFFFF"/>
-                </a:solidFill>
-              </a14:hiddenFill>
-            </a:ext>
-            <a:ext uri="{91240B29-F687-4F45-9708-019B960494DF}">
-              <a14:hiddenLine xmlns:a14="http://schemas.microsoft.com/office/drawing/2010/main" w="9525">
-                <a:solidFill>
-                  <a:srgbClr val="000000"/>
-                </a:solidFill>
-                <a:miter lim="800000"/>
-                <a:headEnd/>
-                <a:tailEnd/>
-              </a14:hiddenLine>
-            </a:ext>
-          </a:extLst>
-        </p:spPr>
-        <p:txBody>
-          <a:bodyPr lIns="91426" tIns="45713" rIns="91426" bIns="45713">
-            <a:spAutoFit/>
-          </a:bodyPr>
-          <a:lstStyle>
-            <a:lvl1pPr>
-              <a:spcBef>
-                <a:spcPct val="20000"/>
-              </a:spcBef>
-              <a:buChar char="•"/>
-              <a:defRPr sz="3200">
-                <a:solidFill>
-                  <a:schemeClr val="tx1"/>
-                </a:solidFill>
-                <a:latin typeface="Arial" panose="020B0604020202020204" pitchFamily="34" charset="0"/>
-              </a:defRPr>
-            </a:lvl1pPr>
-            <a:lvl2pPr marL="742950" indent="-285750">
-              <a:spcBef>
-                <a:spcPct val="20000"/>
-              </a:spcBef>
-              <a:buChar char="–"/>
-              <a:defRPr sz="2800">
-                <a:solidFill>
-                  <a:schemeClr val="tx1"/>
-                </a:solidFill>
-                <a:latin typeface="Arial" panose="020B0604020202020204" pitchFamily="34" charset="0"/>
-              </a:defRPr>
-            </a:lvl2pPr>
-            <a:lvl3pPr marL="1143000" indent="-228600">
-              <a:spcBef>
-                <a:spcPct val="20000"/>
-              </a:spcBef>
-              <a:buChar char="•"/>
-              <a:defRPr sz="2400">
-                <a:solidFill>
-                  <a:schemeClr val="tx1"/>
-                </a:solidFill>
-                <a:latin typeface="Arial" panose="020B0604020202020204" pitchFamily="34" charset="0"/>
-              </a:defRPr>
-            </a:lvl3pPr>
-            <a:lvl4pPr marL="1600200" indent="-228600">
-              <a:spcBef>
-                <a:spcPct val="20000"/>
-              </a:spcBef>
-              <a:buChar char="–"/>
-              <a:defRPr sz="2000">
-                <a:solidFill>
-                  <a:schemeClr val="tx1"/>
-                </a:solidFill>
-                <a:latin typeface="Arial" panose="020B0604020202020204" pitchFamily="34" charset="0"/>
-              </a:defRPr>
-            </a:lvl4pPr>
-            <a:lvl5pPr marL="2057400" indent="-228600">
-              <a:spcBef>
-                <a:spcPct val="20000"/>
-              </a:spcBef>
-              <a:buChar char="»"/>
-              <a:defRPr sz="2000">
-                <a:solidFill>
-                  <a:schemeClr val="tx1"/>
-                </a:solidFill>
-                <a:latin typeface="Arial" panose="020B0604020202020204" pitchFamily="34" charset="0"/>
-              </a:defRPr>
-            </a:lvl5pPr>
-            <a:lvl6pPr marL="2514600" indent="-228600" eaLnBrk="0" fontAlgn="base" hangingPunct="0">
-              <a:spcBef>
-                <a:spcPct val="20000"/>
-              </a:spcBef>
-              <a:spcAft>
-                <a:spcPct val="0"/>
-              </a:spcAft>
-              <a:buChar char="»"/>
-              <a:defRPr sz="2000">
-                <a:solidFill>
-                  <a:schemeClr val="tx1"/>
-                </a:solidFill>
-                <a:latin typeface="Arial" panose="020B0604020202020204" pitchFamily="34" charset="0"/>
-              </a:defRPr>
-            </a:lvl6pPr>
-            <a:lvl7pPr marL="2971800" indent="-228600" eaLnBrk="0" fontAlgn="base" hangingPunct="0">
-              <a:spcBef>
-                <a:spcPct val="20000"/>
-              </a:spcBef>
-              <a:spcAft>
-                <a:spcPct val="0"/>
-              </a:spcAft>
-              <a:buChar char="»"/>
-              <a:defRPr sz="2000">
-                <a:solidFill>
-                  <a:schemeClr val="tx1"/>
-                </a:solidFill>
-                <a:latin typeface="Arial" panose="020B0604020202020204" pitchFamily="34" charset="0"/>
-              </a:defRPr>
-            </a:lvl7pPr>
-            <a:lvl8pPr marL="3429000" indent="-228600" eaLnBrk="0" fontAlgn="base" hangingPunct="0">
-              <a:spcBef>
-                <a:spcPct val="20000"/>
-              </a:spcBef>
-              <a:spcAft>
-                <a:spcPct val="0"/>
-              </a:spcAft>
-              <a:buChar char="»"/>
-              <a:defRPr sz="2000">
-                <a:solidFill>
-                  <a:schemeClr val="tx1"/>
-                </a:solidFill>
-                <a:latin typeface="Arial" panose="020B0604020202020204" pitchFamily="34" charset="0"/>
-              </a:defRPr>
-            </a:lvl8pPr>
-            <a:lvl9pPr marL="3886200" indent="-228600" eaLnBrk="0" fontAlgn="base" hangingPunct="0">
-              <a:spcBef>
-                <a:spcPct val="20000"/>
-              </a:spcBef>
-              <a:spcAft>
-                <a:spcPct val="0"/>
-              </a:spcAft>
-              <a:buChar char="»"/>
-              <a:defRPr sz="2000">
-                <a:solidFill>
-                  <a:schemeClr val="tx1"/>
-                </a:solidFill>
-                <a:latin typeface="Arial" panose="020B0604020202020204" pitchFamily="34" charset="0"/>
-              </a:defRPr>
-            </a:lvl9pPr>
-          </a:lstStyle>
-          <a:p>
-            <a:pPr algn="ctr" eaLnBrk="1" hangingPunct="1">
-              <a:spcBef>
-                <a:spcPct val="0"/>
-              </a:spcBef>
-              <a:buFontTx/>
-              <a:buNone/>
-            </a:pPr>
-            <a:r>
-              <a:rPr lang="pt-BR" altLang="pt-BR" sz="5600" b="1" dirty="0">
-                <a:latin typeface="Arial Black" panose="020B0A04020102020204" pitchFamily="34" charset="0"/>
-              </a:rPr>
-              <a:t>NOME</a:t>
+              <a:t>EMPRESA</a:t>
             </a:r>
           </a:p>
         </p:txBody>

--- a/templates/30x10.5/cni.pptx
+++ b/templates/30x10.5/cni.pptx
@@ -4120,195 +4120,6 @@
           <a:chExt cx="0" cy="0"/>
         </a:xfrm>
       </p:grpSpPr>
-      <p:sp>
-        <p:nvSpPr>
-          <p:cNvPr id="3074" name="Text Box 9">
-            <a:extLst>
-              <a:ext uri="{FF2B5EF4-FFF2-40B4-BE49-F238E27FC236}">
-                <a16:creationId xmlns:a16="http://schemas.microsoft.com/office/drawing/2014/main" id="{7C8F1E7A-FFEE-0B33-14D8-B7AC3772D1A2}"/>
-              </a:ext>
-            </a:extLst>
-          </p:cNvPr>
-          <p:cNvSpPr txBox="1">
-            <a:spLocks noChangeArrowheads="1"/>
-          </p:cNvSpPr>
-          <p:nvPr/>
-        </p:nvSpPr>
-        <p:spPr bwMode="auto">
-          <a:xfrm>
-            <a:off x="0" y="4424361"/>
-            <a:ext cx="9906000" cy="954093"/>
-          </a:xfrm>
-          <a:prstGeom prst="rect">
-            <a:avLst/>
-          </a:prstGeom>
-          <a:noFill/>
-          <a:ln>
-            <a:noFill/>
-          </a:ln>
-          <a:extLst>
-            <a:ext uri="{909E8E84-426E-40DD-AFC4-6F175D3DCCD1}">
-              <a14:hiddenFill xmlns:a14="http://schemas.microsoft.com/office/drawing/2010/main">
-                <a:solidFill>
-                  <a:srgbClr val="FFFFFF"/>
-                </a:solidFill>
-              </a14:hiddenFill>
-            </a:ext>
-            <a:ext uri="{91240B29-F687-4F45-9708-019B960494DF}">
-              <a14:hiddenLine xmlns:a14="http://schemas.microsoft.com/office/drawing/2010/main" w="9525">
-                <a:solidFill>
-                  <a:srgbClr val="000000"/>
-                </a:solidFill>
-                <a:miter lim="800000"/>
-                <a:headEnd/>
-                <a:tailEnd/>
-              </a14:hiddenLine>
-            </a:ext>
-          </a:extLst>
-        </p:spPr>
-        <p:txBody>
-          <a:bodyPr wrap="square" lIns="91426" tIns="45713" rIns="91426" bIns="45713">
-            <a:spAutoFit/>
-          </a:bodyPr>
-          <a:lstStyle>
-            <a:lvl1pPr>
-              <a:spcBef>
-                <a:spcPct val="20000"/>
-              </a:spcBef>
-              <a:buChar char="•"/>
-              <a:defRPr sz="3200">
-                <a:solidFill>
-                  <a:schemeClr val="tx1"/>
-                </a:solidFill>
-                <a:latin typeface="Arial" panose="020B0604020202020204" pitchFamily="34" charset="0"/>
-              </a:defRPr>
-            </a:lvl1pPr>
-            <a:lvl2pPr marL="742950" indent="-285750">
-              <a:spcBef>
-                <a:spcPct val="20000"/>
-              </a:spcBef>
-              <a:buChar char="–"/>
-              <a:defRPr sz="2800">
-                <a:solidFill>
-                  <a:schemeClr val="tx1"/>
-                </a:solidFill>
-                <a:latin typeface="Arial" panose="020B0604020202020204" pitchFamily="34" charset="0"/>
-              </a:defRPr>
-            </a:lvl2pPr>
-            <a:lvl3pPr marL="1143000" indent="-228600">
-              <a:spcBef>
-                <a:spcPct val="20000"/>
-              </a:spcBef>
-              <a:buChar char="•"/>
-              <a:defRPr sz="2400">
-                <a:solidFill>
-                  <a:schemeClr val="tx1"/>
-                </a:solidFill>
-                <a:latin typeface="Arial" panose="020B0604020202020204" pitchFamily="34" charset="0"/>
-              </a:defRPr>
-            </a:lvl3pPr>
-            <a:lvl4pPr marL="1600200" indent="-228600">
-              <a:spcBef>
-                <a:spcPct val="20000"/>
-              </a:spcBef>
-              <a:buChar char="–"/>
-              <a:defRPr sz="2000">
-                <a:solidFill>
-                  <a:schemeClr val="tx1"/>
-                </a:solidFill>
-                <a:latin typeface="Arial" panose="020B0604020202020204" pitchFamily="34" charset="0"/>
-              </a:defRPr>
-            </a:lvl4pPr>
-            <a:lvl5pPr marL="2057400" indent="-228600">
-              <a:spcBef>
-                <a:spcPct val="20000"/>
-              </a:spcBef>
-              <a:buChar char="»"/>
-              <a:defRPr sz="2000">
-                <a:solidFill>
-                  <a:schemeClr val="tx1"/>
-                </a:solidFill>
-                <a:latin typeface="Arial" panose="020B0604020202020204" pitchFamily="34" charset="0"/>
-              </a:defRPr>
-            </a:lvl5pPr>
-            <a:lvl6pPr marL="2514600" indent="-228600" eaLnBrk="0" fontAlgn="base" hangingPunct="0">
-              <a:spcBef>
-                <a:spcPct val="20000"/>
-              </a:spcBef>
-              <a:spcAft>
-                <a:spcPct val="0"/>
-              </a:spcAft>
-              <a:buChar char="»"/>
-              <a:defRPr sz="2000">
-                <a:solidFill>
-                  <a:schemeClr val="tx1"/>
-                </a:solidFill>
-                <a:latin typeface="Arial" panose="020B0604020202020204" pitchFamily="34" charset="0"/>
-              </a:defRPr>
-            </a:lvl6pPr>
-            <a:lvl7pPr marL="2971800" indent="-228600" eaLnBrk="0" fontAlgn="base" hangingPunct="0">
-              <a:spcBef>
-                <a:spcPct val="20000"/>
-              </a:spcBef>
-              <a:spcAft>
-                <a:spcPct val="0"/>
-              </a:spcAft>
-              <a:buChar char="»"/>
-              <a:defRPr sz="2000">
-                <a:solidFill>
-                  <a:schemeClr val="tx1"/>
-                </a:solidFill>
-                <a:latin typeface="Arial" panose="020B0604020202020204" pitchFamily="34" charset="0"/>
-              </a:defRPr>
-            </a:lvl7pPr>
-            <a:lvl8pPr marL="3429000" indent="-228600" eaLnBrk="0" fontAlgn="base" hangingPunct="0">
-              <a:spcBef>
-                <a:spcPct val="20000"/>
-              </a:spcBef>
-              <a:spcAft>
-                <a:spcPct val="0"/>
-              </a:spcAft>
-              <a:buChar char="»"/>
-              <a:defRPr sz="2000">
-                <a:solidFill>
-                  <a:schemeClr val="tx1"/>
-                </a:solidFill>
-                <a:latin typeface="Arial" panose="020B0604020202020204" pitchFamily="34" charset="0"/>
-              </a:defRPr>
-            </a:lvl8pPr>
-            <a:lvl9pPr marL="3886200" indent="-228600" eaLnBrk="0" fontAlgn="base" hangingPunct="0">
-              <a:spcBef>
-                <a:spcPct val="20000"/>
-              </a:spcBef>
-              <a:spcAft>
-                <a:spcPct val="0"/>
-              </a:spcAft>
-              <a:buChar char="»"/>
-              <a:defRPr sz="2000">
-                <a:solidFill>
-                  <a:schemeClr val="tx1"/>
-                </a:solidFill>
-                <a:latin typeface="Arial" panose="020B0604020202020204" pitchFamily="34" charset="0"/>
-              </a:defRPr>
-            </a:lvl9pPr>
-          </a:lstStyle>
-          <a:p>
-            <a:pPr algn="ctr" eaLnBrk="1" hangingPunct="1">
-              <a:spcBef>
-                <a:spcPct val="0"/>
-              </a:spcBef>
-              <a:buFontTx/>
-              <a:buNone/>
-            </a:pPr>
-            <a:r>
-              <a:rPr lang="pt-BR" altLang="pt-BR" sz="5600" b="1" dirty="0">
-                <a:latin typeface="Arial Black" panose="020B0A04020102020204" pitchFamily="34" charset="0"/>
-              </a:rPr>
-              <a:t>NOME</a:t>
-            </a:r>
-          </a:p>
-        </p:txBody>
-      </p:sp>
       <p:pic>
         <p:nvPicPr>
           <p:cNvPr id="3076" name="Imagem 2" descr="Texto&#10;&#10;O conteúdo gerado por IA pode estar incorreto.">
@@ -4611,375 +4422,73 @@
       </p:pic>
       <p:sp>
         <p:nvSpPr>
-          <p:cNvPr id="4" name="Text Box 9">
+          <p:cNvPr id="27" name="CaixaDeTexto 26">
             <a:extLst>
               <a:ext uri="{FF2B5EF4-FFF2-40B4-BE49-F238E27FC236}">
-                <a16:creationId xmlns:a16="http://schemas.microsoft.com/office/drawing/2014/main" id="{2EA6D9E3-6B27-ED00-E8F9-3786445DB311}"/>
+                <a16:creationId xmlns:a16="http://schemas.microsoft.com/office/drawing/2014/main" id="{7E909658-CE4A-0371-3BBE-B7CA1841A1CC}"/>
               </a:ext>
             </a:extLst>
           </p:cNvPr>
-          <p:cNvSpPr txBox="1">
-            <a:spLocks noChangeArrowheads="1"/>
-          </p:cNvSpPr>
+          <p:cNvSpPr txBox="1"/>
           <p:nvPr/>
         </p:nvSpPr>
-        <p:spPr bwMode="auto">
+        <p:spPr>
           <a:xfrm>
-            <a:off x="-15876" y="5184689"/>
-            <a:ext cx="9921875" cy="707872"/>
+            <a:off x="0" y="4534585"/>
+            <a:ext cx="9905998" cy="954107"/>
           </a:xfrm>
           <a:prstGeom prst="rect">
             <a:avLst/>
           </a:prstGeom>
           <a:noFill/>
-          <a:ln>
-            <a:noFill/>
-          </a:ln>
-          <a:extLst>
-            <a:ext uri="{909E8E84-426E-40DD-AFC4-6F175D3DCCD1}">
-              <a14:hiddenFill xmlns:a14="http://schemas.microsoft.com/office/drawing/2010/main">
-                <a:solidFill>
-                  <a:srgbClr val="FFFFFF"/>
-                </a:solidFill>
-              </a14:hiddenFill>
-            </a:ext>
-            <a:ext uri="{91240B29-F687-4F45-9708-019B960494DF}">
-              <a14:hiddenLine xmlns:a14="http://schemas.microsoft.com/office/drawing/2010/main" w="9525">
-                <a:solidFill>
-                  <a:srgbClr val="000000"/>
-                </a:solidFill>
-                <a:miter lim="800000"/>
-                <a:headEnd/>
-                <a:tailEnd/>
-              </a14:hiddenLine>
-            </a:ext>
-          </a:extLst>
-        </p:spPr>
-        <p:txBody>
-          <a:bodyPr lIns="91426" tIns="45713" rIns="91426" bIns="45713">
+        </p:spPr>
+        <p:txBody>
+          <a:bodyPr wrap="square" rtlCol="0">
             <a:spAutoFit/>
           </a:bodyPr>
-          <a:lstStyle>
-            <a:lvl1pPr>
-              <a:spcBef>
-                <a:spcPct val="20000"/>
-              </a:spcBef>
-              <a:buChar char="•"/>
-              <a:defRPr sz="3200">
-                <a:solidFill>
-                  <a:schemeClr val="tx1"/>
-                </a:solidFill>
-                <a:latin typeface="Arial" panose="020B0604020202020204" pitchFamily="34" charset="0"/>
-              </a:defRPr>
-            </a:lvl1pPr>
-            <a:lvl2pPr marL="742950" indent="-285750">
-              <a:spcBef>
-                <a:spcPct val="20000"/>
-              </a:spcBef>
-              <a:buChar char="–"/>
-              <a:defRPr sz="2800">
-                <a:solidFill>
-                  <a:schemeClr val="tx1"/>
-                </a:solidFill>
-                <a:latin typeface="Arial" panose="020B0604020202020204" pitchFamily="34" charset="0"/>
-              </a:defRPr>
-            </a:lvl2pPr>
-            <a:lvl3pPr marL="1143000" indent="-228600">
-              <a:spcBef>
-                <a:spcPct val="20000"/>
-              </a:spcBef>
-              <a:buChar char="•"/>
-              <a:defRPr sz="2400">
-                <a:solidFill>
-                  <a:schemeClr val="tx1"/>
-                </a:solidFill>
-                <a:latin typeface="Arial" panose="020B0604020202020204" pitchFamily="34" charset="0"/>
-              </a:defRPr>
-            </a:lvl3pPr>
-            <a:lvl4pPr marL="1600200" indent="-228600">
-              <a:spcBef>
-                <a:spcPct val="20000"/>
-              </a:spcBef>
-              <a:buChar char="–"/>
-              <a:defRPr sz="2000">
-                <a:solidFill>
-                  <a:schemeClr val="tx1"/>
-                </a:solidFill>
-                <a:latin typeface="Arial" panose="020B0604020202020204" pitchFamily="34" charset="0"/>
-              </a:defRPr>
-            </a:lvl4pPr>
-            <a:lvl5pPr marL="2057400" indent="-228600">
-              <a:spcBef>
-                <a:spcPct val="20000"/>
-              </a:spcBef>
-              <a:buChar char="»"/>
-              <a:defRPr sz="2000">
-                <a:solidFill>
-                  <a:schemeClr val="tx1"/>
-                </a:solidFill>
-                <a:latin typeface="Arial" panose="020B0604020202020204" pitchFamily="34" charset="0"/>
-              </a:defRPr>
-            </a:lvl5pPr>
-            <a:lvl6pPr marL="2514600" indent="-228600" eaLnBrk="0" fontAlgn="base" hangingPunct="0">
-              <a:spcBef>
-                <a:spcPct val="20000"/>
-              </a:spcBef>
-              <a:spcAft>
-                <a:spcPct val="0"/>
-              </a:spcAft>
-              <a:buChar char="»"/>
-              <a:defRPr sz="2000">
-                <a:solidFill>
-                  <a:schemeClr val="tx1"/>
-                </a:solidFill>
-                <a:latin typeface="Arial" panose="020B0604020202020204" pitchFamily="34" charset="0"/>
-              </a:defRPr>
-            </a:lvl6pPr>
-            <a:lvl7pPr marL="2971800" indent="-228600" eaLnBrk="0" fontAlgn="base" hangingPunct="0">
-              <a:spcBef>
-                <a:spcPct val="20000"/>
-              </a:spcBef>
-              <a:spcAft>
-                <a:spcPct val="0"/>
-              </a:spcAft>
-              <a:buChar char="»"/>
-              <a:defRPr sz="2000">
-                <a:solidFill>
-                  <a:schemeClr val="tx1"/>
-                </a:solidFill>
-                <a:latin typeface="Arial" panose="020B0604020202020204" pitchFamily="34" charset="0"/>
-              </a:defRPr>
-            </a:lvl7pPr>
-            <a:lvl8pPr marL="3429000" indent="-228600" eaLnBrk="0" fontAlgn="base" hangingPunct="0">
-              <a:spcBef>
-                <a:spcPct val="20000"/>
-              </a:spcBef>
-              <a:spcAft>
-                <a:spcPct val="0"/>
-              </a:spcAft>
-              <a:buChar char="»"/>
-              <a:defRPr sz="2000">
-                <a:solidFill>
-                  <a:schemeClr val="tx1"/>
-                </a:solidFill>
-                <a:latin typeface="Arial" panose="020B0604020202020204" pitchFamily="34" charset="0"/>
-              </a:defRPr>
-            </a:lvl8pPr>
-            <a:lvl9pPr marL="3886200" indent="-228600" eaLnBrk="0" fontAlgn="base" hangingPunct="0">
-              <a:spcBef>
-                <a:spcPct val="20000"/>
-              </a:spcBef>
-              <a:spcAft>
-                <a:spcPct val="0"/>
-              </a:spcAft>
-              <a:buChar char="»"/>
-              <a:defRPr sz="2000">
-                <a:solidFill>
-                  <a:schemeClr val="tx1"/>
-                </a:solidFill>
-                <a:latin typeface="Arial" panose="020B0604020202020204" pitchFamily="34" charset="0"/>
-              </a:defRPr>
-            </a:lvl9pPr>
-          </a:lstStyle>
-          <a:p>
-            <a:pPr algn="ctr" eaLnBrk="1" hangingPunct="1">
-              <a:spcBef>
-                <a:spcPct val="0"/>
-              </a:spcBef>
-              <a:buFontTx/>
-              <a:buNone/>
-            </a:pPr>
-            <a:r>
-              <a:rPr lang="pt-BR" altLang="pt-BR" sz="4000" b="1" dirty="0">
+          <a:lstStyle/>
+          <a:p>
+            <a:pPr algn="ctr"/>
+            <a:r>
+              <a:rPr lang="pt-BR" sz="5600" b="1" dirty="0">
                 <a:latin typeface="Arial Black" panose="020B0A04020102020204" pitchFamily="34" charset="0"/>
               </a:rPr>
-              <a:t>CARGO</a:t>
-            </a:r>
-          </a:p>
-        </p:txBody>
-      </p:sp>
-      <p:sp>
-        <p:nvSpPr>
-          <p:cNvPr id="8" name="Text Box 9">
+              <a:t>NOME</a:t>
+            </a:r>
+          </a:p>
+        </p:txBody>
+      </p:sp>
+      <p:sp>
+        <p:nvSpPr>
+          <p:cNvPr id="29" name="CaixaDeTexto 28">
             <a:extLst>
               <a:ext uri="{FF2B5EF4-FFF2-40B4-BE49-F238E27FC236}">
-                <a16:creationId xmlns:a16="http://schemas.microsoft.com/office/drawing/2014/main" id="{61F04680-D62A-7DE1-395E-620CEFCA605A}"/>
+                <a16:creationId xmlns:a16="http://schemas.microsoft.com/office/drawing/2014/main" id="{2C93D1EF-1E6B-1C3D-9A7E-2366EEB600E7}"/>
               </a:ext>
             </a:extLst>
           </p:cNvPr>
-          <p:cNvSpPr txBox="1">
-            <a:spLocks noChangeArrowheads="1"/>
-          </p:cNvSpPr>
+          <p:cNvSpPr txBox="1"/>
           <p:nvPr/>
         </p:nvSpPr>
-        <p:spPr bwMode="auto">
+        <p:spPr>
           <a:xfrm>
-            <a:off x="-1" y="5726909"/>
-            <a:ext cx="9921875" cy="707872"/>
+            <a:off x="1" y="5259185"/>
+            <a:ext cx="9905998" cy="707886"/>
           </a:xfrm>
           <a:prstGeom prst="rect">
             <a:avLst/>
           </a:prstGeom>
           <a:noFill/>
-          <a:ln>
-            <a:noFill/>
-          </a:ln>
-          <a:extLst>
-            <a:ext uri="{909E8E84-426E-40DD-AFC4-6F175D3DCCD1}">
-              <a14:hiddenFill xmlns:a14="http://schemas.microsoft.com/office/drawing/2010/main">
-                <a:solidFill>
-                  <a:srgbClr val="FFFFFF"/>
-                </a:solidFill>
-              </a14:hiddenFill>
-            </a:ext>
-            <a:ext uri="{91240B29-F687-4F45-9708-019B960494DF}">
-              <a14:hiddenLine xmlns:a14="http://schemas.microsoft.com/office/drawing/2010/main" w="9525">
-                <a:solidFill>
-                  <a:srgbClr val="000000"/>
-                </a:solidFill>
-                <a:miter lim="800000"/>
-                <a:headEnd/>
-                <a:tailEnd/>
-              </a14:hiddenLine>
-            </a:ext>
-          </a:extLst>
-        </p:spPr>
-        <p:txBody>
-          <a:bodyPr lIns="91426" tIns="45713" rIns="91426" bIns="45713">
+        </p:spPr>
+        <p:txBody>
+          <a:bodyPr wrap="square" rtlCol="0">
             <a:spAutoFit/>
           </a:bodyPr>
-          <a:lstStyle>
-            <a:lvl1pPr>
-              <a:spcBef>
-                <a:spcPct val="20000"/>
-              </a:spcBef>
-              <a:buChar char="•"/>
-              <a:defRPr sz="3200">
-                <a:solidFill>
-                  <a:schemeClr val="tx1"/>
-                </a:solidFill>
-                <a:latin typeface="Arial" panose="020B0604020202020204" pitchFamily="34" charset="0"/>
-              </a:defRPr>
-            </a:lvl1pPr>
-            <a:lvl2pPr marL="742950" indent="-285750">
-              <a:spcBef>
-                <a:spcPct val="20000"/>
-              </a:spcBef>
-              <a:buChar char="–"/>
-              <a:defRPr sz="2800">
-                <a:solidFill>
-                  <a:schemeClr val="tx1"/>
-                </a:solidFill>
-                <a:latin typeface="Arial" panose="020B0604020202020204" pitchFamily="34" charset="0"/>
-              </a:defRPr>
-            </a:lvl2pPr>
-            <a:lvl3pPr marL="1143000" indent="-228600">
-              <a:spcBef>
-                <a:spcPct val="20000"/>
-              </a:spcBef>
-              <a:buChar char="•"/>
-              <a:defRPr sz="2400">
-                <a:solidFill>
-                  <a:schemeClr val="tx1"/>
-                </a:solidFill>
-                <a:latin typeface="Arial" panose="020B0604020202020204" pitchFamily="34" charset="0"/>
-              </a:defRPr>
-            </a:lvl3pPr>
-            <a:lvl4pPr marL="1600200" indent="-228600">
-              <a:spcBef>
-                <a:spcPct val="20000"/>
-              </a:spcBef>
-              <a:buChar char="–"/>
-              <a:defRPr sz="2000">
-                <a:solidFill>
-                  <a:schemeClr val="tx1"/>
-                </a:solidFill>
-                <a:latin typeface="Arial" panose="020B0604020202020204" pitchFamily="34" charset="0"/>
-              </a:defRPr>
-            </a:lvl4pPr>
-            <a:lvl5pPr marL="2057400" indent="-228600">
-              <a:spcBef>
-                <a:spcPct val="20000"/>
-              </a:spcBef>
-              <a:buChar char="»"/>
-              <a:defRPr sz="2000">
-                <a:solidFill>
-                  <a:schemeClr val="tx1"/>
-                </a:solidFill>
-                <a:latin typeface="Arial" panose="020B0604020202020204" pitchFamily="34" charset="0"/>
-              </a:defRPr>
-            </a:lvl5pPr>
-            <a:lvl6pPr marL="2514600" indent="-228600" eaLnBrk="0" fontAlgn="base" hangingPunct="0">
-              <a:spcBef>
-                <a:spcPct val="20000"/>
-              </a:spcBef>
-              <a:spcAft>
-                <a:spcPct val="0"/>
-              </a:spcAft>
-              <a:buChar char="»"/>
-              <a:defRPr sz="2000">
-                <a:solidFill>
-                  <a:schemeClr val="tx1"/>
-                </a:solidFill>
-                <a:latin typeface="Arial" panose="020B0604020202020204" pitchFamily="34" charset="0"/>
-              </a:defRPr>
-            </a:lvl6pPr>
-            <a:lvl7pPr marL="2971800" indent="-228600" eaLnBrk="0" fontAlgn="base" hangingPunct="0">
-              <a:spcBef>
-                <a:spcPct val="20000"/>
-              </a:spcBef>
-              <a:spcAft>
-                <a:spcPct val="0"/>
-              </a:spcAft>
-              <a:buChar char="»"/>
-              <a:defRPr sz="2000">
-                <a:solidFill>
-                  <a:schemeClr val="tx1"/>
-                </a:solidFill>
-                <a:latin typeface="Arial" panose="020B0604020202020204" pitchFamily="34" charset="0"/>
-              </a:defRPr>
-            </a:lvl7pPr>
-            <a:lvl8pPr marL="3429000" indent="-228600" eaLnBrk="0" fontAlgn="base" hangingPunct="0">
-              <a:spcBef>
-                <a:spcPct val="20000"/>
-              </a:spcBef>
-              <a:spcAft>
-                <a:spcPct val="0"/>
-              </a:spcAft>
-              <a:buChar char="»"/>
-              <a:defRPr sz="2000">
-                <a:solidFill>
-                  <a:schemeClr val="tx1"/>
-                </a:solidFill>
-                <a:latin typeface="Arial" panose="020B0604020202020204" pitchFamily="34" charset="0"/>
-              </a:defRPr>
-            </a:lvl8pPr>
-            <a:lvl9pPr marL="3886200" indent="-228600" eaLnBrk="0" fontAlgn="base" hangingPunct="0">
-              <a:spcBef>
-                <a:spcPct val="20000"/>
-              </a:spcBef>
-              <a:spcAft>
-                <a:spcPct val="0"/>
-              </a:spcAft>
-              <a:buChar char="»"/>
-              <a:defRPr sz="2000">
-                <a:solidFill>
-                  <a:schemeClr val="tx1"/>
-                </a:solidFill>
-                <a:latin typeface="Arial" panose="020B0604020202020204" pitchFamily="34" charset="0"/>
-              </a:defRPr>
-            </a:lvl9pPr>
-          </a:lstStyle>
-          <a:p>
-            <a:pPr algn="ctr" eaLnBrk="1" hangingPunct="1">
-              <a:spcBef>
-                <a:spcPct val="0"/>
-              </a:spcBef>
-              <a:buFontTx/>
-              <a:buNone/>
-            </a:pPr>
-            <a:r>
-              <a:rPr lang="pt-BR" altLang="pt-BR" sz="4000" b="1" dirty="0">
+          <a:lstStyle/>
+          <a:p>
+            <a:pPr algn="ctr"/>
+            <a:r>
+              <a:rPr lang="pt-BR" sz="4000" b="1" dirty="0">
                 <a:latin typeface="Arial Black" panose="020B0A04020102020204" pitchFamily="34" charset="0"/>
               </a:rPr>
               <a:t>EMPRESA</a:t>
@@ -4989,567 +4498,152 @@
       </p:sp>
       <p:sp>
         <p:nvSpPr>
-          <p:cNvPr id="5" name="Text Box 9">
+          <p:cNvPr id="31" name="CaixaDeTexto 30">
             <a:extLst>
               <a:ext uri="{FF2B5EF4-FFF2-40B4-BE49-F238E27FC236}">
-                <a16:creationId xmlns:a16="http://schemas.microsoft.com/office/drawing/2014/main" id="{F1D7BA32-176E-7460-0302-62E39D691E08}"/>
+                <a16:creationId xmlns:a16="http://schemas.microsoft.com/office/drawing/2014/main" id="{87619A73-2139-21AF-EE11-D20DB93745DA}"/>
               </a:ext>
             </a:extLst>
           </p:cNvPr>
-          <p:cNvSpPr txBox="1">
-            <a:spLocks noChangeArrowheads="1"/>
-          </p:cNvSpPr>
+          <p:cNvSpPr txBox="1"/>
           <p:nvPr/>
         </p:nvSpPr>
-        <p:spPr bwMode="auto">
-          <a:xfrm rot="10800000">
-            <a:off x="-15875" y="236288"/>
-            <a:ext cx="9906000" cy="954093"/>
+        <p:spPr>
+          <a:xfrm>
+            <a:off x="0" y="5803771"/>
+            <a:ext cx="9905999" cy="707886"/>
           </a:xfrm>
           <a:prstGeom prst="rect">
             <a:avLst/>
           </a:prstGeom>
           <a:noFill/>
-          <a:ln>
-            <a:noFill/>
-          </a:ln>
-          <a:extLst>
-            <a:ext uri="{909E8E84-426E-40DD-AFC4-6F175D3DCCD1}">
-              <a14:hiddenFill xmlns:a14="http://schemas.microsoft.com/office/drawing/2010/main">
-                <a:solidFill>
-                  <a:srgbClr val="FFFFFF"/>
-                </a:solidFill>
-              </a14:hiddenFill>
-            </a:ext>
-            <a:ext uri="{91240B29-F687-4F45-9708-019B960494DF}">
-              <a14:hiddenLine xmlns:a14="http://schemas.microsoft.com/office/drawing/2010/main" w="9525">
-                <a:solidFill>
-                  <a:srgbClr val="000000"/>
-                </a:solidFill>
-                <a:miter lim="800000"/>
-                <a:headEnd/>
-                <a:tailEnd/>
-              </a14:hiddenLine>
-            </a:ext>
-          </a:extLst>
-        </p:spPr>
-        <p:txBody>
-          <a:bodyPr wrap="square" lIns="91426" tIns="45713" rIns="91426" bIns="45713">
+        </p:spPr>
+        <p:txBody>
+          <a:bodyPr wrap="square" rtlCol="0">
             <a:spAutoFit/>
           </a:bodyPr>
-          <a:lstStyle>
-            <a:lvl1pPr>
-              <a:spcBef>
-                <a:spcPct val="20000"/>
-              </a:spcBef>
-              <a:buChar char="•"/>
-              <a:defRPr sz="3200">
-                <a:solidFill>
-                  <a:schemeClr val="tx1"/>
-                </a:solidFill>
-                <a:latin typeface="Arial" panose="020B0604020202020204" pitchFamily="34" charset="0"/>
-              </a:defRPr>
-            </a:lvl1pPr>
-            <a:lvl2pPr marL="742950" indent="-285750">
-              <a:spcBef>
-                <a:spcPct val="20000"/>
-              </a:spcBef>
-              <a:buChar char="–"/>
-              <a:defRPr sz="2800">
-                <a:solidFill>
-                  <a:schemeClr val="tx1"/>
-                </a:solidFill>
-                <a:latin typeface="Arial" panose="020B0604020202020204" pitchFamily="34" charset="0"/>
-              </a:defRPr>
-            </a:lvl2pPr>
-            <a:lvl3pPr marL="1143000" indent="-228600">
-              <a:spcBef>
-                <a:spcPct val="20000"/>
-              </a:spcBef>
-              <a:buChar char="•"/>
-              <a:defRPr sz="2400">
-                <a:solidFill>
-                  <a:schemeClr val="tx1"/>
-                </a:solidFill>
-                <a:latin typeface="Arial" panose="020B0604020202020204" pitchFamily="34" charset="0"/>
-              </a:defRPr>
-            </a:lvl3pPr>
-            <a:lvl4pPr marL="1600200" indent="-228600">
-              <a:spcBef>
-                <a:spcPct val="20000"/>
-              </a:spcBef>
-              <a:buChar char="–"/>
-              <a:defRPr sz="2000">
-                <a:solidFill>
-                  <a:schemeClr val="tx1"/>
-                </a:solidFill>
-                <a:latin typeface="Arial" panose="020B0604020202020204" pitchFamily="34" charset="0"/>
-              </a:defRPr>
-            </a:lvl4pPr>
-            <a:lvl5pPr marL="2057400" indent="-228600">
-              <a:spcBef>
-                <a:spcPct val="20000"/>
-              </a:spcBef>
-              <a:buChar char="»"/>
-              <a:defRPr sz="2000">
-                <a:solidFill>
-                  <a:schemeClr val="tx1"/>
-                </a:solidFill>
-                <a:latin typeface="Arial" panose="020B0604020202020204" pitchFamily="34" charset="0"/>
-              </a:defRPr>
-            </a:lvl5pPr>
-            <a:lvl6pPr marL="2514600" indent="-228600" eaLnBrk="0" fontAlgn="base" hangingPunct="0">
-              <a:spcBef>
-                <a:spcPct val="20000"/>
-              </a:spcBef>
-              <a:spcAft>
-                <a:spcPct val="0"/>
-              </a:spcAft>
-              <a:buChar char="»"/>
-              <a:defRPr sz="2000">
-                <a:solidFill>
-                  <a:schemeClr val="tx1"/>
-                </a:solidFill>
-                <a:latin typeface="Arial" panose="020B0604020202020204" pitchFamily="34" charset="0"/>
-              </a:defRPr>
-            </a:lvl6pPr>
-            <a:lvl7pPr marL="2971800" indent="-228600" eaLnBrk="0" fontAlgn="base" hangingPunct="0">
-              <a:spcBef>
-                <a:spcPct val="20000"/>
-              </a:spcBef>
-              <a:spcAft>
-                <a:spcPct val="0"/>
-              </a:spcAft>
-              <a:buChar char="»"/>
-              <a:defRPr sz="2000">
-                <a:solidFill>
-                  <a:schemeClr val="tx1"/>
-                </a:solidFill>
-                <a:latin typeface="Arial" panose="020B0604020202020204" pitchFamily="34" charset="0"/>
-              </a:defRPr>
-            </a:lvl7pPr>
-            <a:lvl8pPr marL="3429000" indent="-228600" eaLnBrk="0" fontAlgn="base" hangingPunct="0">
-              <a:spcBef>
-                <a:spcPct val="20000"/>
-              </a:spcBef>
-              <a:spcAft>
-                <a:spcPct val="0"/>
-              </a:spcAft>
-              <a:buChar char="»"/>
-              <a:defRPr sz="2000">
-                <a:solidFill>
-                  <a:schemeClr val="tx1"/>
-                </a:solidFill>
-                <a:latin typeface="Arial" panose="020B0604020202020204" pitchFamily="34" charset="0"/>
-              </a:defRPr>
-            </a:lvl8pPr>
-            <a:lvl9pPr marL="3886200" indent="-228600" eaLnBrk="0" fontAlgn="base" hangingPunct="0">
-              <a:spcBef>
-                <a:spcPct val="20000"/>
-              </a:spcBef>
-              <a:spcAft>
-                <a:spcPct val="0"/>
-              </a:spcAft>
-              <a:buChar char="»"/>
-              <a:defRPr sz="2000">
-                <a:solidFill>
-                  <a:schemeClr val="tx1"/>
-                </a:solidFill>
-                <a:latin typeface="Arial" panose="020B0604020202020204" pitchFamily="34" charset="0"/>
-              </a:defRPr>
-            </a:lvl9pPr>
-          </a:lstStyle>
-          <a:p>
-            <a:pPr algn="ctr" eaLnBrk="1" hangingPunct="1">
-              <a:spcBef>
-                <a:spcPct val="0"/>
-              </a:spcBef>
-              <a:buFontTx/>
-              <a:buNone/>
-            </a:pPr>
-            <a:r>
-              <a:rPr lang="pt-BR" altLang="pt-BR" sz="5600" b="1" dirty="0">
+          <a:lstStyle/>
+          <a:p>
+            <a:pPr algn="ctr"/>
+            <a:r>
+              <a:rPr lang="pt-BR" sz="4000" b="1" dirty="0">
                 <a:latin typeface="Arial Black" panose="020B0A04020102020204" pitchFamily="34" charset="0"/>
               </a:rPr>
-              <a:t>NOME</a:t>
-            </a:r>
-          </a:p>
-        </p:txBody>
-      </p:sp>
-      <p:sp>
-        <p:nvSpPr>
-          <p:cNvPr id="7" name="Text Box 9">
+              <a:t>CARGO</a:t>
+            </a:r>
+          </a:p>
+        </p:txBody>
+      </p:sp>
+      <p:sp>
+        <p:nvSpPr>
+          <p:cNvPr id="33" name="CaixaDeTexto 32">
             <a:extLst>
               <a:ext uri="{FF2B5EF4-FFF2-40B4-BE49-F238E27FC236}">
-                <a16:creationId xmlns:a16="http://schemas.microsoft.com/office/drawing/2014/main" id="{5BF99797-F8CE-6912-ED50-6B8FC4C536C5}"/>
+                <a16:creationId xmlns:a16="http://schemas.microsoft.com/office/drawing/2014/main" id="{89F6CE8B-B56F-D5B8-F80A-01214B670DAF}"/>
               </a:ext>
             </a:extLst>
           </p:cNvPr>
-          <p:cNvSpPr txBox="1">
-            <a:spLocks noChangeArrowheads="1"/>
-          </p:cNvSpPr>
+          <p:cNvSpPr txBox="1"/>
           <p:nvPr/>
         </p:nvSpPr>
-        <p:spPr bwMode="auto">
+        <p:spPr>
           <a:xfrm rot="10800000">
-            <a:off x="-31751" y="996616"/>
-            <a:ext cx="9921875" cy="707872"/>
+            <a:off x="3" y="1308080"/>
+            <a:ext cx="9905997" cy="954107"/>
           </a:xfrm>
           <a:prstGeom prst="rect">
             <a:avLst/>
           </a:prstGeom>
           <a:noFill/>
-          <a:ln>
-            <a:noFill/>
-          </a:ln>
-          <a:extLst>
-            <a:ext uri="{909E8E84-426E-40DD-AFC4-6F175D3DCCD1}">
-              <a14:hiddenFill xmlns:a14="http://schemas.microsoft.com/office/drawing/2010/main">
-                <a:solidFill>
-                  <a:srgbClr val="FFFFFF"/>
-                </a:solidFill>
-              </a14:hiddenFill>
-            </a:ext>
-            <a:ext uri="{91240B29-F687-4F45-9708-019B960494DF}">
-              <a14:hiddenLine xmlns:a14="http://schemas.microsoft.com/office/drawing/2010/main" w="9525">
-                <a:solidFill>
-                  <a:srgbClr val="000000"/>
-                </a:solidFill>
-                <a:miter lim="800000"/>
-                <a:headEnd/>
-                <a:tailEnd/>
-              </a14:hiddenLine>
-            </a:ext>
-          </a:extLst>
-        </p:spPr>
-        <p:txBody>
-          <a:bodyPr lIns="91426" tIns="45713" rIns="91426" bIns="45713">
+        </p:spPr>
+        <p:txBody>
+          <a:bodyPr wrap="square" rtlCol="0">
             <a:spAutoFit/>
           </a:bodyPr>
-          <a:lstStyle>
-            <a:lvl1pPr>
-              <a:spcBef>
-                <a:spcPct val="20000"/>
-              </a:spcBef>
-              <a:buChar char="•"/>
-              <a:defRPr sz="3200">
-                <a:solidFill>
-                  <a:schemeClr val="tx1"/>
-                </a:solidFill>
-                <a:latin typeface="Arial" panose="020B0604020202020204" pitchFamily="34" charset="0"/>
-              </a:defRPr>
-            </a:lvl1pPr>
-            <a:lvl2pPr marL="742950" indent="-285750">
-              <a:spcBef>
-                <a:spcPct val="20000"/>
-              </a:spcBef>
-              <a:buChar char="–"/>
-              <a:defRPr sz="2800">
-                <a:solidFill>
-                  <a:schemeClr val="tx1"/>
-                </a:solidFill>
-                <a:latin typeface="Arial" panose="020B0604020202020204" pitchFamily="34" charset="0"/>
-              </a:defRPr>
-            </a:lvl2pPr>
-            <a:lvl3pPr marL="1143000" indent="-228600">
-              <a:spcBef>
-                <a:spcPct val="20000"/>
-              </a:spcBef>
-              <a:buChar char="•"/>
-              <a:defRPr sz="2400">
-                <a:solidFill>
-                  <a:schemeClr val="tx1"/>
-                </a:solidFill>
-                <a:latin typeface="Arial" panose="020B0604020202020204" pitchFamily="34" charset="0"/>
-              </a:defRPr>
-            </a:lvl3pPr>
-            <a:lvl4pPr marL="1600200" indent="-228600">
-              <a:spcBef>
-                <a:spcPct val="20000"/>
-              </a:spcBef>
-              <a:buChar char="–"/>
-              <a:defRPr sz="2000">
-                <a:solidFill>
-                  <a:schemeClr val="tx1"/>
-                </a:solidFill>
-                <a:latin typeface="Arial" panose="020B0604020202020204" pitchFamily="34" charset="0"/>
-              </a:defRPr>
-            </a:lvl4pPr>
-            <a:lvl5pPr marL="2057400" indent="-228600">
-              <a:spcBef>
-                <a:spcPct val="20000"/>
-              </a:spcBef>
-              <a:buChar char="»"/>
-              <a:defRPr sz="2000">
-                <a:solidFill>
-                  <a:schemeClr val="tx1"/>
-                </a:solidFill>
-                <a:latin typeface="Arial" panose="020B0604020202020204" pitchFamily="34" charset="0"/>
-              </a:defRPr>
-            </a:lvl5pPr>
-            <a:lvl6pPr marL="2514600" indent="-228600" eaLnBrk="0" fontAlgn="base" hangingPunct="0">
-              <a:spcBef>
-                <a:spcPct val="20000"/>
-              </a:spcBef>
-              <a:spcAft>
-                <a:spcPct val="0"/>
-              </a:spcAft>
-              <a:buChar char="»"/>
-              <a:defRPr sz="2000">
-                <a:solidFill>
-                  <a:schemeClr val="tx1"/>
-                </a:solidFill>
-                <a:latin typeface="Arial" panose="020B0604020202020204" pitchFamily="34" charset="0"/>
-              </a:defRPr>
-            </a:lvl6pPr>
-            <a:lvl7pPr marL="2971800" indent="-228600" eaLnBrk="0" fontAlgn="base" hangingPunct="0">
-              <a:spcBef>
-                <a:spcPct val="20000"/>
-              </a:spcBef>
-              <a:spcAft>
-                <a:spcPct val="0"/>
-              </a:spcAft>
-              <a:buChar char="»"/>
-              <a:defRPr sz="2000">
-                <a:solidFill>
-                  <a:schemeClr val="tx1"/>
-                </a:solidFill>
-                <a:latin typeface="Arial" panose="020B0604020202020204" pitchFamily="34" charset="0"/>
-              </a:defRPr>
-            </a:lvl7pPr>
-            <a:lvl8pPr marL="3429000" indent="-228600" eaLnBrk="0" fontAlgn="base" hangingPunct="0">
-              <a:spcBef>
-                <a:spcPct val="20000"/>
-              </a:spcBef>
-              <a:spcAft>
-                <a:spcPct val="0"/>
-              </a:spcAft>
-              <a:buChar char="»"/>
-              <a:defRPr sz="2000">
-                <a:solidFill>
-                  <a:schemeClr val="tx1"/>
-                </a:solidFill>
-                <a:latin typeface="Arial" panose="020B0604020202020204" pitchFamily="34" charset="0"/>
-              </a:defRPr>
-            </a:lvl8pPr>
-            <a:lvl9pPr marL="3886200" indent="-228600" eaLnBrk="0" fontAlgn="base" hangingPunct="0">
-              <a:spcBef>
-                <a:spcPct val="20000"/>
-              </a:spcBef>
-              <a:spcAft>
-                <a:spcPct val="0"/>
-              </a:spcAft>
-              <a:buChar char="»"/>
-              <a:defRPr sz="2000">
-                <a:solidFill>
-                  <a:schemeClr val="tx1"/>
-                </a:solidFill>
-                <a:latin typeface="Arial" panose="020B0604020202020204" pitchFamily="34" charset="0"/>
-              </a:defRPr>
-            </a:lvl9pPr>
-          </a:lstStyle>
-          <a:p>
-            <a:pPr algn="ctr" eaLnBrk="1" hangingPunct="1">
-              <a:spcBef>
-                <a:spcPct val="0"/>
-              </a:spcBef>
-              <a:buFontTx/>
-              <a:buNone/>
-            </a:pPr>
-            <a:r>
-              <a:rPr lang="pt-BR" altLang="pt-BR" sz="4000" b="1" dirty="0">
+          <a:lstStyle/>
+          <a:p>
+            <a:pPr algn="ctr"/>
+            <a:r>
+              <a:rPr lang="pt-BR" sz="5600" b="1" dirty="0">
                 <a:latin typeface="Arial Black" panose="020B0A04020102020204" pitchFamily="34" charset="0"/>
               </a:rPr>
-              <a:t>CARGO</a:t>
-            </a:r>
-          </a:p>
-        </p:txBody>
-      </p:sp>
-      <p:sp>
-        <p:nvSpPr>
-          <p:cNvPr id="11" name="Text Box 9">
+              <a:t>NOME</a:t>
+            </a:r>
+          </a:p>
+        </p:txBody>
+      </p:sp>
+      <p:sp>
+        <p:nvSpPr>
+          <p:cNvPr id="35" name="CaixaDeTexto 34">
             <a:extLst>
               <a:ext uri="{FF2B5EF4-FFF2-40B4-BE49-F238E27FC236}">
-                <a16:creationId xmlns:a16="http://schemas.microsoft.com/office/drawing/2014/main" id="{35178476-2575-6BAF-9D6B-DBC14355F63E}"/>
+                <a16:creationId xmlns:a16="http://schemas.microsoft.com/office/drawing/2014/main" id="{47769B04-2F67-0DEF-E0A3-65A8CFE5A83B}"/>
               </a:ext>
             </a:extLst>
           </p:cNvPr>
-          <p:cNvSpPr txBox="1">
-            <a:spLocks noChangeArrowheads="1"/>
-          </p:cNvSpPr>
+          <p:cNvSpPr txBox="1"/>
           <p:nvPr/>
         </p:nvSpPr>
-        <p:spPr bwMode="auto">
+        <p:spPr>
           <a:xfrm rot="10800000">
-            <a:off x="-15876" y="1538836"/>
-            <a:ext cx="9921875" cy="707872"/>
+            <a:off x="-1" y="824050"/>
+            <a:ext cx="9905994" cy="707886"/>
           </a:xfrm>
           <a:prstGeom prst="rect">
             <a:avLst/>
           </a:prstGeom>
           <a:noFill/>
-          <a:ln>
-            <a:noFill/>
-          </a:ln>
-          <a:extLst>
-            <a:ext uri="{909E8E84-426E-40DD-AFC4-6F175D3DCCD1}">
-              <a14:hiddenFill xmlns:a14="http://schemas.microsoft.com/office/drawing/2010/main">
-                <a:solidFill>
-                  <a:srgbClr val="FFFFFF"/>
-                </a:solidFill>
-              </a14:hiddenFill>
-            </a:ext>
-            <a:ext uri="{91240B29-F687-4F45-9708-019B960494DF}">
-              <a14:hiddenLine xmlns:a14="http://schemas.microsoft.com/office/drawing/2010/main" w="9525">
-                <a:solidFill>
-                  <a:srgbClr val="000000"/>
-                </a:solidFill>
-                <a:miter lim="800000"/>
-                <a:headEnd/>
-                <a:tailEnd/>
-              </a14:hiddenLine>
-            </a:ext>
-          </a:extLst>
-        </p:spPr>
-        <p:txBody>
-          <a:bodyPr lIns="91426" tIns="45713" rIns="91426" bIns="45713">
+        </p:spPr>
+        <p:txBody>
+          <a:bodyPr wrap="square" rtlCol="0">
             <a:spAutoFit/>
           </a:bodyPr>
-          <a:lstStyle>
-            <a:lvl1pPr>
-              <a:spcBef>
-                <a:spcPct val="20000"/>
-              </a:spcBef>
-              <a:buChar char="•"/>
-              <a:defRPr sz="3200">
-                <a:solidFill>
-                  <a:schemeClr val="tx1"/>
-                </a:solidFill>
-                <a:latin typeface="Arial" panose="020B0604020202020204" pitchFamily="34" charset="0"/>
-              </a:defRPr>
-            </a:lvl1pPr>
-            <a:lvl2pPr marL="742950" indent="-285750">
-              <a:spcBef>
-                <a:spcPct val="20000"/>
-              </a:spcBef>
-              <a:buChar char="–"/>
-              <a:defRPr sz="2800">
-                <a:solidFill>
-                  <a:schemeClr val="tx1"/>
-                </a:solidFill>
-                <a:latin typeface="Arial" panose="020B0604020202020204" pitchFamily="34" charset="0"/>
-              </a:defRPr>
-            </a:lvl2pPr>
-            <a:lvl3pPr marL="1143000" indent="-228600">
-              <a:spcBef>
-                <a:spcPct val="20000"/>
-              </a:spcBef>
-              <a:buChar char="•"/>
-              <a:defRPr sz="2400">
-                <a:solidFill>
-                  <a:schemeClr val="tx1"/>
-                </a:solidFill>
-                <a:latin typeface="Arial" panose="020B0604020202020204" pitchFamily="34" charset="0"/>
-              </a:defRPr>
-            </a:lvl3pPr>
-            <a:lvl4pPr marL="1600200" indent="-228600">
-              <a:spcBef>
-                <a:spcPct val="20000"/>
-              </a:spcBef>
-              <a:buChar char="–"/>
-              <a:defRPr sz="2000">
-                <a:solidFill>
-                  <a:schemeClr val="tx1"/>
-                </a:solidFill>
-                <a:latin typeface="Arial" panose="020B0604020202020204" pitchFamily="34" charset="0"/>
-              </a:defRPr>
-            </a:lvl4pPr>
-            <a:lvl5pPr marL="2057400" indent="-228600">
-              <a:spcBef>
-                <a:spcPct val="20000"/>
-              </a:spcBef>
-              <a:buChar char="»"/>
-              <a:defRPr sz="2000">
-                <a:solidFill>
-                  <a:schemeClr val="tx1"/>
-                </a:solidFill>
-                <a:latin typeface="Arial" panose="020B0604020202020204" pitchFamily="34" charset="0"/>
-              </a:defRPr>
-            </a:lvl5pPr>
-            <a:lvl6pPr marL="2514600" indent="-228600" eaLnBrk="0" fontAlgn="base" hangingPunct="0">
-              <a:spcBef>
-                <a:spcPct val="20000"/>
-              </a:spcBef>
-              <a:spcAft>
-                <a:spcPct val="0"/>
-              </a:spcAft>
-              <a:buChar char="»"/>
-              <a:defRPr sz="2000">
-                <a:solidFill>
-                  <a:schemeClr val="tx1"/>
-                </a:solidFill>
-                <a:latin typeface="Arial" panose="020B0604020202020204" pitchFamily="34" charset="0"/>
-              </a:defRPr>
-            </a:lvl6pPr>
-            <a:lvl7pPr marL="2971800" indent="-228600" eaLnBrk="0" fontAlgn="base" hangingPunct="0">
-              <a:spcBef>
-                <a:spcPct val="20000"/>
-              </a:spcBef>
-              <a:spcAft>
-                <a:spcPct val="0"/>
-              </a:spcAft>
-              <a:buChar char="»"/>
-              <a:defRPr sz="2000">
-                <a:solidFill>
-                  <a:schemeClr val="tx1"/>
-                </a:solidFill>
-                <a:latin typeface="Arial" panose="020B0604020202020204" pitchFamily="34" charset="0"/>
-              </a:defRPr>
-            </a:lvl7pPr>
-            <a:lvl8pPr marL="3429000" indent="-228600" eaLnBrk="0" fontAlgn="base" hangingPunct="0">
-              <a:spcBef>
-                <a:spcPct val="20000"/>
-              </a:spcBef>
-              <a:spcAft>
-                <a:spcPct val="0"/>
-              </a:spcAft>
-              <a:buChar char="»"/>
-              <a:defRPr sz="2000">
-                <a:solidFill>
-                  <a:schemeClr val="tx1"/>
-                </a:solidFill>
-                <a:latin typeface="Arial" panose="020B0604020202020204" pitchFamily="34" charset="0"/>
-              </a:defRPr>
-            </a:lvl8pPr>
-            <a:lvl9pPr marL="3886200" indent="-228600" eaLnBrk="0" fontAlgn="base" hangingPunct="0">
-              <a:spcBef>
-                <a:spcPct val="20000"/>
-              </a:spcBef>
-              <a:spcAft>
-                <a:spcPct val="0"/>
-              </a:spcAft>
-              <a:buChar char="»"/>
-              <a:defRPr sz="2000">
-                <a:solidFill>
-                  <a:schemeClr val="tx1"/>
-                </a:solidFill>
-                <a:latin typeface="Arial" panose="020B0604020202020204" pitchFamily="34" charset="0"/>
-              </a:defRPr>
-            </a:lvl9pPr>
-          </a:lstStyle>
-          <a:p>
-            <a:pPr algn="ctr" eaLnBrk="1" hangingPunct="1">
-              <a:spcBef>
-                <a:spcPct val="0"/>
-              </a:spcBef>
-              <a:buFontTx/>
-              <a:buNone/>
-            </a:pPr>
-            <a:r>
-              <a:rPr lang="pt-BR" altLang="pt-BR" sz="4000" b="1" dirty="0">
+          <a:lstStyle/>
+          <a:p>
+            <a:pPr algn="ctr"/>
+            <a:r>
+              <a:rPr lang="pt-BR" sz="4000" b="1" dirty="0">
                 <a:latin typeface="Arial Black" panose="020B0A04020102020204" pitchFamily="34" charset="0"/>
               </a:rPr>
               <a:t>EMPRESA</a:t>
+            </a:r>
+          </a:p>
+        </p:txBody>
+      </p:sp>
+      <p:sp>
+        <p:nvSpPr>
+          <p:cNvPr id="37" name="CaixaDeTexto 36">
+            <a:extLst>
+              <a:ext uri="{FF2B5EF4-FFF2-40B4-BE49-F238E27FC236}">
+                <a16:creationId xmlns:a16="http://schemas.microsoft.com/office/drawing/2014/main" id="{5F7E4763-E6E6-1F3E-A0F8-53EFD1D085C9}"/>
+              </a:ext>
+            </a:extLst>
+          </p:cNvPr>
+          <p:cNvSpPr txBox="1"/>
+          <p:nvPr/>
+        </p:nvSpPr>
+        <p:spPr>
+          <a:xfrm rot="10800000">
+            <a:off x="-1" y="265682"/>
+            <a:ext cx="9905996" cy="707886"/>
+          </a:xfrm>
+          <a:prstGeom prst="rect">
+            <a:avLst/>
+          </a:prstGeom>
+          <a:noFill/>
+        </p:spPr>
+        <p:txBody>
+          <a:bodyPr wrap="square" rtlCol="0">
+            <a:spAutoFit/>
+          </a:bodyPr>
+          <a:lstStyle/>
+          <a:p>
+            <a:pPr algn="ctr"/>
+            <a:r>
+              <a:rPr lang="pt-BR" sz="4000" b="1" dirty="0">
+                <a:latin typeface="Arial Black" panose="020B0A04020102020204" pitchFamily="34" charset="0"/>
+              </a:rPr>
+              <a:t>CARGO</a:t>
             </a:r>
           </a:p>
         </p:txBody>

--- a/templates/30x10.5/cni.pptx
+++ b/templates/30x10.5/cni.pptx
@@ -4,8 +4,11 @@
   <p:sldMasterIdLst>
     <p:sldMasterId id="2147483648" r:id="rId1"/>
   </p:sldMasterIdLst>
+  <p:notesMasterIdLst>
+    <p:notesMasterId r:id="rId3"/>
+  </p:notesMasterIdLst>
   <p:handoutMasterIdLst>
-    <p:handoutMasterId r:id="rId3"/>
+    <p:handoutMasterId r:id="rId4"/>
   </p:handoutMasterIdLst>
   <p:sldIdLst>
     <p:sldId id="398" r:id="rId2"/>
@@ -549,6 +552,355 @@
   </p:cSld>
   <p:clrMap bg1="lt1" tx1="dk1" bg2="lt2" tx2="dk2" accent1="accent1" accent2="accent2" accent3="accent3" accent4="accent4" accent5="accent5" accent6="accent6" hlink="hlink" folHlink="folHlink"/>
 </p:handoutMaster>
+</file>
+
+<file path=ppt/notesMasters/notesMaster1.xml><?xml version="1.0" encoding="utf-8"?>
+<p:notesMaster xmlns:a="http://schemas.openxmlformats.org/drawingml/2006/main" xmlns:r="http://schemas.openxmlformats.org/officeDocument/2006/relationships" xmlns:p="http://schemas.openxmlformats.org/presentationml/2006/main">
+  <p:cSld>
+    <p:bg>
+      <p:bgRef idx="1001">
+        <a:schemeClr val="bg1"/>
+      </p:bgRef>
+    </p:bg>
+    <p:spTree>
+      <p:nvGrpSpPr>
+        <p:cNvPr id="1" name=""/>
+        <p:cNvGrpSpPr/>
+        <p:nvPr/>
+      </p:nvGrpSpPr>
+      <p:grpSpPr>
+        <a:xfrm>
+          <a:off x="0" y="0"/>
+          <a:ext cx="0" cy="0"/>
+          <a:chOff x="0" y="0"/>
+          <a:chExt cx="0" cy="0"/>
+        </a:xfrm>
+      </p:grpSpPr>
+      <p:sp>
+        <p:nvSpPr>
+          <p:cNvPr id="2" name="Espaço Reservado para Cabeçalho 1"/>
+          <p:cNvSpPr>
+            <a:spLocks noGrp="1"/>
+          </p:cNvSpPr>
+          <p:nvPr>
+            <p:ph type="hdr" sz="quarter"/>
+          </p:nvPr>
+        </p:nvSpPr>
+        <p:spPr>
+          <a:xfrm>
+            <a:off x="0" y="0"/>
+            <a:ext cx="2949575" cy="498475"/>
+          </a:xfrm>
+          <a:prstGeom prst="rect">
+            <a:avLst/>
+          </a:prstGeom>
+        </p:spPr>
+        <p:txBody>
+          <a:bodyPr vert="horz" lIns="91440" tIns="45720" rIns="91440" bIns="45720" rtlCol="0"/>
+          <a:lstStyle>
+            <a:lvl1pPr algn="l">
+              <a:defRPr sz="1200"/>
+            </a:lvl1pPr>
+          </a:lstStyle>
+          <a:p>
+            <a:endParaRPr lang="pt-BR"/>
+          </a:p>
+        </p:txBody>
+      </p:sp>
+      <p:sp>
+        <p:nvSpPr>
+          <p:cNvPr id="3" name="Espaço Reservado para Data 2"/>
+          <p:cNvSpPr>
+            <a:spLocks noGrp="1"/>
+          </p:cNvSpPr>
+          <p:nvPr>
+            <p:ph type="dt" idx="1"/>
+          </p:nvPr>
+        </p:nvSpPr>
+        <p:spPr>
+          <a:xfrm>
+            <a:off x="3854450" y="0"/>
+            <a:ext cx="2949575" cy="498475"/>
+          </a:xfrm>
+          <a:prstGeom prst="rect">
+            <a:avLst/>
+          </a:prstGeom>
+        </p:spPr>
+        <p:txBody>
+          <a:bodyPr vert="horz" lIns="91440" tIns="45720" rIns="91440" bIns="45720" rtlCol="0"/>
+          <a:lstStyle>
+            <a:lvl1pPr algn="r">
+              <a:defRPr sz="1200"/>
+            </a:lvl1pPr>
+          </a:lstStyle>
+          <a:p>
+            <a:fld id="{D0E32DC4-68E8-4DCE-9830-907E10BB680F}" type="datetimeFigureOut">
+              <a:rPr lang="pt-BR" smtClean="0"/>
+              <a:t>23/10/2026</a:t>
+            </a:fld>
+            <a:endParaRPr lang="pt-BR"/>
+          </a:p>
+        </p:txBody>
+      </p:sp>
+      <p:sp>
+        <p:nvSpPr>
+          <p:cNvPr id="4" name="Espaço Reservado para Imagem de Slide 3"/>
+          <p:cNvSpPr>
+            <a:spLocks noGrp="1" noRot="1" noChangeAspect="1"/>
+          </p:cNvSpPr>
+          <p:nvPr>
+            <p:ph type="sldImg" idx="2"/>
+          </p:nvPr>
+        </p:nvSpPr>
+        <p:spPr>
+          <a:xfrm>
+            <a:off x="979488" y="1243013"/>
+            <a:ext cx="4846637" cy="3355975"/>
+          </a:xfrm>
+          <a:prstGeom prst="rect">
+            <a:avLst/>
+          </a:prstGeom>
+          <a:noFill/>
+          <a:ln w="12700">
+            <a:solidFill>
+              <a:prstClr val="black"/>
+            </a:solidFill>
+          </a:ln>
+        </p:spPr>
+        <p:txBody>
+          <a:bodyPr vert="horz" lIns="91440" tIns="45720" rIns="91440" bIns="45720" rtlCol="0" anchor="ctr"/>
+          <a:lstStyle/>
+          <a:p>
+            <a:endParaRPr lang="pt-BR"/>
+          </a:p>
+        </p:txBody>
+      </p:sp>
+      <p:sp>
+        <p:nvSpPr>
+          <p:cNvPr id="5" name="Espaço Reservado para Anotações 4"/>
+          <p:cNvSpPr>
+            <a:spLocks noGrp="1"/>
+          </p:cNvSpPr>
+          <p:nvPr>
+            <p:ph type="body" sz="quarter" idx="3"/>
+          </p:nvPr>
+        </p:nvSpPr>
+        <p:spPr>
+          <a:xfrm>
+            <a:off x="681038" y="4786313"/>
+            <a:ext cx="5443537" cy="3914775"/>
+          </a:xfrm>
+          <a:prstGeom prst="rect">
+            <a:avLst/>
+          </a:prstGeom>
+        </p:spPr>
+        <p:txBody>
+          <a:bodyPr vert="horz" lIns="91440" tIns="45720" rIns="91440" bIns="45720" rtlCol="0"/>
+          <a:lstStyle/>
+          <a:p>
+            <a:pPr lvl="0"/>
+            <a:r>
+              <a:rPr lang="pt-BR"/>
+              <a:t>Clique para editar os estilos de texto Mestres</a:t>
+            </a:r>
+          </a:p>
+          <a:p>
+            <a:pPr lvl="1"/>
+            <a:r>
+              <a:rPr lang="pt-BR"/>
+              <a:t>Segundo nível</a:t>
+            </a:r>
+          </a:p>
+          <a:p>
+            <a:pPr lvl="2"/>
+            <a:r>
+              <a:rPr lang="pt-BR"/>
+              <a:t>Terceiro nível</a:t>
+            </a:r>
+          </a:p>
+          <a:p>
+            <a:pPr lvl="3"/>
+            <a:r>
+              <a:rPr lang="pt-BR"/>
+              <a:t>Quarto nível</a:t>
+            </a:r>
+          </a:p>
+          <a:p>
+            <a:pPr lvl="4"/>
+            <a:r>
+              <a:rPr lang="pt-BR"/>
+              <a:t>Quinto nível</a:t>
+            </a:r>
+          </a:p>
+        </p:txBody>
+      </p:sp>
+      <p:sp>
+        <p:nvSpPr>
+          <p:cNvPr id="6" name="Espaço Reservado para Rodapé 5"/>
+          <p:cNvSpPr>
+            <a:spLocks noGrp="1"/>
+          </p:cNvSpPr>
+          <p:nvPr>
+            <p:ph type="ftr" sz="quarter" idx="4"/>
+          </p:nvPr>
+        </p:nvSpPr>
+        <p:spPr>
+          <a:xfrm>
+            <a:off x="0" y="9445625"/>
+            <a:ext cx="2949575" cy="498475"/>
+          </a:xfrm>
+          <a:prstGeom prst="rect">
+            <a:avLst/>
+          </a:prstGeom>
+        </p:spPr>
+        <p:txBody>
+          <a:bodyPr vert="horz" lIns="91440" tIns="45720" rIns="91440" bIns="45720" rtlCol="0" anchor="b"/>
+          <a:lstStyle>
+            <a:lvl1pPr algn="l">
+              <a:defRPr sz="1200"/>
+            </a:lvl1pPr>
+          </a:lstStyle>
+          <a:p>
+            <a:endParaRPr lang="pt-BR"/>
+          </a:p>
+        </p:txBody>
+      </p:sp>
+      <p:sp>
+        <p:nvSpPr>
+          <p:cNvPr id="7" name="Espaço Reservado para Número de Slide 6"/>
+          <p:cNvSpPr>
+            <a:spLocks noGrp="1"/>
+          </p:cNvSpPr>
+          <p:nvPr>
+            <p:ph type="sldNum" sz="quarter" idx="5"/>
+          </p:nvPr>
+        </p:nvSpPr>
+        <p:spPr>
+          <a:xfrm>
+            <a:off x="3854450" y="9445625"/>
+            <a:ext cx="2949575" cy="498475"/>
+          </a:xfrm>
+          <a:prstGeom prst="rect">
+            <a:avLst/>
+          </a:prstGeom>
+        </p:spPr>
+        <p:txBody>
+          <a:bodyPr vert="horz" lIns="91440" tIns="45720" rIns="91440" bIns="45720" rtlCol="0" anchor="b"/>
+          <a:lstStyle>
+            <a:lvl1pPr algn="r">
+              <a:defRPr sz="1200"/>
+            </a:lvl1pPr>
+          </a:lstStyle>
+          <a:p>
+            <a:fld id="{F4D1A913-3B3E-456F-889E-CCDA7E3A4EC0}" type="slidenum">
+              <a:rPr lang="pt-BR" smtClean="0"/>
+              <a:t>‹nº›</a:t>
+            </a:fld>
+            <a:endParaRPr lang="pt-BR"/>
+          </a:p>
+        </p:txBody>
+      </p:sp>
+    </p:spTree>
+    <p:extLst>
+      <p:ext uri="{BB962C8B-B14F-4D97-AF65-F5344CB8AC3E}">
+        <p14:creationId xmlns:p14="http://schemas.microsoft.com/office/powerpoint/2010/main" val="3488844940"/>
+      </p:ext>
+    </p:extLst>
+  </p:cSld>
+  <p:clrMap bg1="lt1" tx1="dk1" bg2="lt2" tx2="dk2" accent1="accent1" accent2="accent2" accent3="accent3" accent4="accent4" accent5="accent5" accent6="accent6" hlink="hlink" folHlink="folHlink"/>
+  <p:notesStyle>
+    <a:lvl1pPr marL="0" algn="l" defTabSz="914400" rtl="0" eaLnBrk="1" latinLnBrk="0" hangingPunct="1">
+      <a:defRPr sz="1200" kern="1200">
+        <a:solidFill>
+          <a:schemeClr val="tx1"/>
+        </a:solidFill>
+        <a:latin typeface="+mn-lt"/>
+        <a:ea typeface="+mn-ea"/>
+        <a:cs typeface="+mn-cs"/>
+      </a:defRPr>
+    </a:lvl1pPr>
+    <a:lvl2pPr marL="457200" algn="l" defTabSz="914400" rtl="0" eaLnBrk="1" latinLnBrk="0" hangingPunct="1">
+      <a:defRPr sz="1200" kern="1200">
+        <a:solidFill>
+          <a:schemeClr val="tx1"/>
+        </a:solidFill>
+        <a:latin typeface="+mn-lt"/>
+        <a:ea typeface="+mn-ea"/>
+        <a:cs typeface="+mn-cs"/>
+      </a:defRPr>
+    </a:lvl2pPr>
+    <a:lvl3pPr marL="914400" algn="l" defTabSz="914400" rtl="0" eaLnBrk="1" latinLnBrk="0" hangingPunct="1">
+      <a:defRPr sz="1200" kern="1200">
+        <a:solidFill>
+          <a:schemeClr val="tx1"/>
+        </a:solidFill>
+        <a:latin typeface="+mn-lt"/>
+        <a:ea typeface="+mn-ea"/>
+        <a:cs typeface="+mn-cs"/>
+      </a:defRPr>
+    </a:lvl3pPr>
+    <a:lvl4pPr marL="1371600" algn="l" defTabSz="914400" rtl="0" eaLnBrk="1" latinLnBrk="0" hangingPunct="1">
+      <a:defRPr sz="1200" kern="1200">
+        <a:solidFill>
+          <a:schemeClr val="tx1"/>
+        </a:solidFill>
+        <a:latin typeface="+mn-lt"/>
+        <a:ea typeface="+mn-ea"/>
+        <a:cs typeface="+mn-cs"/>
+      </a:defRPr>
+    </a:lvl4pPr>
+    <a:lvl5pPr marL="1828800" algn="l" defTabSz="914400" rtl="0" eaLnBrk="1" latinLnBrk="0" hangingPunct="1">
+      <a:defRPr sz="1200" kern="1200">
+        <a:solidFill>
+          <a:schemeClr val="tx1"/>
+        </a:solidFill>
+        <a:latin typeface="+mn-lt"/>
+        <a:ea typeface="+mn-ea"/>
+        <a:cs typeface="+mn-cs"/>
+      </a:defRPr>
+    </a:lvl5pPr>
+    <a:lvl6pPr marL="2286000" algn="l" defTabSz="914400" rtl="0" eaLnBrk="1" latinLnBrk="0" hangingPunct="1">
+      <a:defRPr sz="1200" kern="1200">
+        <a:solidFill>
+          <a:schemeClr val="tx1"/>
+        </a:solidFill>
+        <a:latin typeface="+mn-lt"/>
+        <a:ea typeface="+mn-ea"/>
+        <a:cs typeface="+mn-cs"/>
+      </a:defRPr>
+    </a:lvl6pPr>
+    <a:lvl7pPr marL="2743200" algn="l" defTabSz="914400" rtl="0" eaLnBrk="1" latinLnBrk="0" hangingPunct="1">
+      <a:defRPr sz="1200" kern="1200">
+        <a:solidFill>
+          <a:schemeClr val="tx1"/>
+        </a:solidFill>
+        <a:latin typeface="+mn-lt"/>
+        <a:ea typeface="+mn-ea"/>
+        <a:cs typeface="+mn-cs"/>
+      </a:defRPr>
+    </a:lvl7pPr>
+    <a:lvl8pPr marL="3200400" algn="l" defTabSz="914400" rtl="0" eaLnBrk="1" latinLnBrk="0" hangingPunct="1">
+      <a:defRPr sz="1200" kern="1200">
+        <a:solidFill>
+          <a:schemeClr val="tx1"/>
+        </a:solidFill>
+        <a:latin typeface="+mn-lt"/>
+        <a:ea typeface="+mn-ea"/>
+        <a:cs typeface="+mn-cs"/>
+      </a:defRPr>
+    </a:lvl8pPr>
+    <a:lvl9pPr marL="3657600" algn="l" defTabSz="914400" rtl="0" eaLnBrk="1" latinLnBrk="0" hangingPunct="1">
+      <a:defRPr sz="1200" kern="1200">
+        <a:solidFill>
+          <a:schemeClr val="tx1"/>
+        </a:solidFill>
+        <a:latin typeface="+mn-lt"/>
+        <a:ea typeface="+mn-ea"/>
+        <a:cs typeface="+mn-cs"/>
+      </a:defRPr>
+    </a:lvl9pPr>
+  </p:notesStyle>
+</p:notesMaster>
 </file>
 
 <file path=ppt/slideLayouts/slideLayout1.xml><?xml version="1.0" encoding="utf-8"?>
@@ -4149,7 +4501,7 @@
         </p:blipFill>
         <p:spPr bwMode="auto">
           <a:xfrm>
-            <a:off x="0" y="3716338"/>
+            <a:off x="0" y="3578984"/>
             <a:ext cx="2481263" cy="777875"/>
           </a:xfrm>
           <a:prstGeom prst="rect">
@@ -4209,7 +4561,7 @@
         </p:blipFill>
         <p:spPr bwMode="auto">
           <a:xfrm>
-            <a:off x="5024438" y="3505200"/>
+            <a:off x="5024438" y="3457576"/>
             <a:ext cx="4881562" cy="360363"/>
           </a:xfrm>
           <a:prstGeom prst="rect">
@@ -4329,7 +4681,7 @@
         </p:blipFill>
         <p:spPr bwMode="auto">
           <a:xfrm>
-            <a:off x="7424737" y="2262187"/>
+            <a:off x="7424737" y="2470944"/>
             <a:ext cx="2481263" cy="777875"/>
           </a:xfrm>
           <a:prstGeom prst="rect">
@@ -4389,7 +4741,7 @@
         </p:blipFill>
         <p:spPr bwMode="auto">
           <a:xfrm flipH="1" flipV="1">
-            <a:off x="1" y="3130551"/>
+            <a:off x="1" y="3040896"/>
             <a:ext cx="4881562" cy="360363"/>
           </a:xfrm>
           <a:prstGeom prst="rect">
@@ -4498,44 +4850,6 @@
       </p:sp>
       <p:sp>
         <p:nvSpPr>
-          <p:cNvPr id="31" name="CaixaDeTexto 30">
-            <a:extLst>
-              <a:ext uri="{FF2B5EF4-FFF2-40B4-BE49-F238E27FC236}">
-                <a16:creationId xmlns:a16="http://schemas.microsoft.com/office/drawing/2014/main" id="{87619A73-2139-21AF-EE11-D20DB93745DA}"/>
-              </a:ext>
-            </a:extLst>
-          </p:cNvPr>
-          <p:cNvSpPr txBox="1"/>
-          <p:nvPr/>
-        </p:nvSpPr>
-        <p:spPr>
-          <a:xfrm>
-            <a:off x="0" y="5803771"/>
-            <a:ext cx="9905999" cy="707886"/>
-          </a:xfrm>
-          <a:prstGeom prst="rect">
-            <a:avLst/>
-          </a:prstGeom>
-          <a:noFill/>
-        </p:spPr>
-        <p:txBody>
-          <a:bodyPr wrap="square" rtlCol="0">
-            <a:spAutoFit/>
-          </a:bodyPr>
-          <a:lstStyle/>
-          <a:p>
-            <a:pPr algn="ctr"/>
-            <a:r>
-              <a:rPr lang="pt-BR" sz="4000" b="1" dirty="0">
-                <a:latin typeface="Arial Black" panose="020B0A04020102020204" pitchFamily="34" charset="0"/>
-              </a:rPr>
-              <a:t>CARGO</a:t>
-            </a:r>
-          </a:p>
-        </p:txBody>
-      </p:sp>
-      <p:sp>
-        <p:nvSpPr>
           <p:cNvPr id="33" name="CaixaDeTexto 32">
             <a:extLst>
               <a:ext uri="{FF2B5EF4-FFF2-40B4-BE49-F238E27FC236}">
@@ -4612,10 +4926,10 @@
       </p:sp>
       <p:sp>
         <p:nvSpPr>
-          <p:cNvPr id="37" name="CaixaDeTexto 36">
+          <p:cNvPr id="5" name="CaixaDeTexto 4">
             <a:extLst>
               <a:ext uri="{FF2B5EF4-FFF2-40B4-BE49-F238E27FC236}">
-                <a16:creationId xmlns:a16="http://schemas.microsoft.com/office/drawing/2014/main" id="{5F7E4763-E6E6-1F3E-A0F8-53EFD1D085C9}"/>
+                <a16:creationId xmlns:a16="http://schemas.microsoft.com/office/drawing/2014/main" id="{C2422F80-A5EF-56FD-EF63-A35568C1F796}"/>
               </a:ext>
             </a:extLst>
           </p:cNvPr>
@@ -4623,9 +4937,47 @@
           <p:nvPr/>
         </p:nvSpPr>
         <p:spPr>
+          <a:xfrm>
+            <a:off x="2" y="5798105"/>
+            <a:ext cx="9905998" cy="707886"/>
+          </a:xfrm>
+          <a:prstGeom prst="rect">
+            <a:avLst/>
+          </a:prstGeom>
+          <a:noFill/>
+        </p:spPr>
+        <p:txBody>
+          <a:bodyPr wrap="square" rtlCol="0">
+            <a:spAutoFit/>
+          </a:bodyPr>
+          <a:lstStyle/>
+          <a:p>
+            <a:pPr algn="ctr"/>
+            <a:r>
+              <a:rPr lang="pt-BR" sz="4000" b="1" dirty="0">
+                <a:latin typeface="Arial Black" panose="020B0A04020102020204" pitchFamily="34" charset="0"/>
+              </a:rPr>
+              <a:t>CARGO</a:t>
+            </a:r>
+          </a:p>
+        </p:txBody>
+      </p:sp>
+      <p:sp>
+        <p:nvSpPr>
+          <p:cNvPr id="7" name="CaixaDeTexto 6">
+            <a:extLst>
+              <a:ext uri="{FF2B5EF4-FFF2-40B4-BE49-F238E27FC236}">
+                <a16:creationId xmlns:a16="http://schemas.microsoft.com/office/drawing/2014/main" id="{5763A7C6-6473-B41E-2FEA-7EB497ED914F}"/>
+              </a:ext>
+            </a:extLst>
+          </p:cNvPr>
+          <p:cNvSpPr txBox="1"/>
+          <p:nvPr/>
+        </p:nvSpPr>
+        <p:spPr>
           <a:xfrm rot="10800000">
-            <a:off x="-1" y="265682"/>
-            <a:ext cx="9905996" cy="707886"/>
+            <a:off x="2" y="304386"/>
+            <a:ext cx="9905998" cy="707886"/>
           </a:xfrm>
           <a:prstGeom prst="rect">
             <a:avLst/>
@@ -5284,4 +5636,319 @@
     </a:ext>
   </a:extLst>
 </a:theme>
+</file>
+
+<file path=ppt/theme/theme3.xml><?xml version="1.0" encoding="utf-8"?>
+<a:theme xmlns:a="http://schemas.openxmlformats.org/drawingml/2006/main" name="Tema do Office">
+  <a:themeElements>
+    <a:clrScheme name="Office">
+      <a:dk1>
+        <a:sysClr val="windowText" lastClr="000000"/>
+      </a:dk1>
+      <a:lt1>
+        <a:sysClr val="window" lastClr="FFFFFF"/>
+      </a:lt1>
+      <a:dk2>
+        <a:srgbClr val="0E2841"/>
+      </a:dk2>
+      <a:lt2>
+        <a:srgbClr val="E8E8E8"/>
+      </a:lt2>
+      <a:accent1>
+        <a:srgbClr val="156082"/>
+      </a:accent1>
+      <a:accent2>
+        <a:srgbClr val="E97132"/>
+      </a:accent2>
+      <a:accent3>
+        <a:srgbClr val="196B24"/>
+      </a:accent3>
+      <a:accent4>
+        <a:srgbClr val="0F9ED5"/>
+      </a:accent4>
+      <a:accent5>
+        <a:srgbClr val="A02B93"/>
+      </a:accent5>
+      <a:accent6>
+        <a:srgbClr val="4EA72E"/>
+      </a:accent6>
+      <a:hlink>
+        <a:srgbClr val="467886"/>
+      </a:hlink>
+      <a:folHlink>
+        <a:srgbClr val="96607D"/>
+      </a:folHlink>
+    </a:clrScheme>
+    <a:fontScheme name="Office">
+      <a:majorFont>
+        <a:latin typeface="Aptos Display" panose="02110004020202020204"/>
+        <a:ea typeface=""/>
+        <a:cs typeface=""/>
+        <a:font script="Jpan" typeface="游ゴシック Light"/>
+        <a:font script="Hang" typeface="맑은 고딕"/>
+        <a:font script="Hans" typeface="等线 Light"/>
+        <a:font script="Hant" typeface="新細明體"/>
+        <a:font script="Arab" typeface="Times New Roman"/>
+        <a:font script="Hebr" typeface="Times New Roman"/>
+        <a:font script="Thai" typeface="Angsana New"/>
+        <a:font script="Ethi" typeface="Nyala"/>
+        <a:font script="Beng" typeface="Vrinda"/>
+        <a:font script="Gujr" typeface="Shruti"/>
+        <a:font script="Khmr" typeface="MoolBoran"/>
+        <a:font script="Knda" typeface="Tunga"/>
+        <a:font script="Guru" typeface="Raavi"/>
+        <a:font script="Cans" typeface="Euphemia"/>
+        <a:font script="Cher" typeface="Plantagenet Cherokee"/>
+        <a:font script="Yiii" typeface="Microsoft Yi Baiti"/>
+        <a:font script="Tibt" typeface="Microsoft Himalaya"/>
+        <a:font script="Thaa" typeface="MV Boli"/>
+        <a:font script="Deva" typeface="Mangal"/>
+        <a:font script="Telu" typeface="Gautami"/>
+        <a:font script="Taml" typeface="Latha"/>
+        <a:font script="Syrc" typeface="Estrangelo Edessa"/>
+        <a:font script="Orya" typeface="Kalinga"/>
+        <a:font script="Mlym" typeface="Kartika"/>
+        <a:font script="Laoo" typeface="DokChampa"/>
+        <a:font script="Sinh" typeface="Iskoola Pota"/>
+        <a:font script="Mong" typeface="Mongolian Baiti"/>
+        <a:font script="Viet" typeface="Times New Roman"/>
+        <a:font script="Uigh" typeface="Microsoft Uighur"/>
+        <a:font script="Geor" typeface="Sylfaen"/>
+        <a:font script="Armn" typeface="Arial"/>
+        <a:font script="Bugi" typeface="Leelawadee UI"/>
+        <a:font script="Bopo" typeface="Microsoft JhengHei"/>
+        <a:font script="Java" typeface="Javanese Text"/>
+        <a:font script="Lisu" typeface="Segoe UI"/>
+        <a:font script="Mymr" typeface="Myanmar Text"/>
+        <a:font script="Nkoo" typeface="Ebrima"/>
+        <a:font script="Olck" typeface="Nirmala UI"/>
+        <a:font script="Osma" typeface="Ebrima"/>
+        <a:font script="Phag" typeface="Phagspa"/>
+        <a:font script="Syrn" typeface="Estrangelo Edessa"/>
+        <a:font script="Syrj" typeface="Estrangelo Edessa"/>
+        <a:font script="Syre" typeface="Estrangelo Edessa"/>
+        <a:font script="Sora" typeface="Nirmala UI"/>
+        <a:font script="Tale" typeface="Microsoft Tai Le"/>
+        <a:font script="Talu" typeface="Microsoft New Tai Lue"/>
+        <a:font script="Tfng" typeface="Ebrima"/>
+      </a:majorFont>
+      <a:minorFont>
+        <a:latin typeface="Aptos" panose="02110004020202020204"/>
+        <a:ea typeface=""/>
+        <a:cs typeface=""/>
+        <a:font script="Jpan" typeface="游ゴシック"/>
+        <a:font script="Hang" typeface="맑은 고딕"/>
+        <a:font script="Hans" typeface="等线"/>
+        <a:font script="Hant" typeface="新細明體"/>
+        <a:font script="Arab" typeface="Arial"/>
+        <a:font script="Hebr" typeface="Arial"/>
+        <a:font script="Thai" typeface="Cordia New"/>
+        <a:font script="Ethi" typeface="Nyala"/>
+        <a:font script="Beng" typeface="Vrinda"/>
+        <a:font script="Gujr" typeface="Shruti"/>
+        <a:font script="Khmr" typeface="DaunPenh"/>
+        <a:font script="Knda" typeface="Tunga"/>
+        <a:font script="Guru" typeface="Raavi"/>
+        <a:font script="Cans" typeface="Euphemia"/>
+        <a:font script="Cher" typeface="Plantagenet Cherokee"/>
+        <a:font script="Yiii" typeface="Microsoft Yi Baiti"/>
+        <a:font script="Tibt" typeface="Microsoft Himalaya"/>
+        <a:font script="Thaa" typeface="MV Boli"/>
+        <a:font script="Deva" typeface="Mangal"/>
+        <a:font script="Telu" typeface="Gautami"/>
+        <a:font script="Taml" typeface="Latha"/>
+        <a:font script="Syrc" typeface="Estrangelo Edessa"/>
+        <a:font script="Orya" typeface="Kalinga"/>
+        <a:font script="Mlym" typeface="Kartika"/>
+        <a:font script="Laoo" typeface="DokChampa"/>
+        <a:font script="Sinh" typeface="Iskoola Pota"/>
+        <a:font script="Mong" typeface="Mongolian Baiti"/>
+        <a:font script="Viet" typeface="Arial"/>
+        <a:font script="Uigh" typeface="Microsoft Uighur"/>
+        <a:font script="Geor" typeface="Sylfaen"/>
+        <a:font script="Armn" typeface="Arial"/>
+        <a:font script="Bugi" typeface="Leelawadee UI"/>
+        <a:font script="Bopo" typeface="Microsoft JhengHei"/>
+        <a:font script="Java" typeface="Javanese Text"/>
+        <a:font script="Lisu" typeface="Segoe UI"/>
+        <a:font script="Mymr" typeface="Myanmar Text"/>
+        <a:font script="Nkoo" typeface="Ebrima"/>
+        <a:font script="Olck" typeface="Nirmala UI"/>
+        <a:font script="Osma" typeface="Ebrima"/>
+        <a:font script="Phag" typeface="Phagspa"/>
+        <a:font script="Syrn" typeface="Estrangelo Edessa"/>
+        <a:font script="Syrj" typeface="Estrangelo Edessa"/>
+        <a:font script="Syre" typeface="Estrangelo Edessa"/>
+        <a:font script="Sora" typeface="Nirmala UI"/>
+        <a:font script="Tale" typeface="Microsoft Tai Le"/>
+        <a:font script="Talu" typeface="Microsoft New Tai Lue"/>
+        <a:font script="Tfng" typeface="Ebrima"/>
+      </a:minorFont>
+    </a:fontScheme>
+    <a:fmtScheme name="Office">
+      <a:fillStyleLst>
+        <a:solidFill>
+          <a:schemeClr val="phClr"/>
+        </a:solidFill>
+        <a:gradFill rotWithShape="1">
+          <a:gsLst>
+            <a:gs pos="0">
+              <a:schemeClr val="phClr">
+                <a:lumMod val="110000"/>
+                <a:satMod val="105000"/>
+                <a:tint val="67000"/>
+              </a:schemeClr>
+            </a:gs>
+            <a:gs pos="50000">
+              <a:schemeClr val="phClr">
+                <a:lumMod val="105000"/>
+                <a:satMod val="103000"/>
+                <a:tint val="73000"/>
+              </a:schemeClr>
+            </a:gs>
+            <a:gs pos="100000">
+              <a:schemeClr val="phClr">
+                <a:lumMod val="105000"/>
+                <a:satMod val="109000"/>
+                <a:tint val="81000"/>
+              </a:schemeClr>
+            </a:gs>
+          </a:gsLst>
+          <a:lin ang="5400000" scaled="0"/>
+        </a:gradFill>
+        <a:gradFill rotWithShape="1">
+          <a:gsLst>
+            <a:gs pos="0">
+              <a:schemeClr val="phClr">
+                <a:satMod val="103000"/>
+                <a:lumMod val="102000"/>
+                <a:tint val="94000"/>
+              </a:schemeClr>
+            </a:gs>
+            <a:gs pos="50000">
+              <a:schemeClr val="phClr">
+                <a:satMod val="110000"/>
+                <a:lumMod val="100000"/>
+                <a:shade val="100000"/>
+              </a:schemeClr>
+            </a:gs>
+            <a:gs pos="100000">
+              <a:schemeClr val="phClr">
+                <a:lumMod val="99000"/>
+                <a:satMod val="120000"/>
+                <a:shade val="78000"/>
+              </a:schemeClr>
+            </a:gs>
+          </a:gsLst>
+          <a:lin ang="5400000" scaled="0"/>
+        </a:gradFill>
+      </a:fillStyleLst>
+      <a:lnStyleLst>
+        <a:ln w="12700" cap="flat" cmpd="sng" algn="ctr">
+          <a:solidFill>
+            <a:schemeClr val="phClr"/>
+          </a:solidFill>
+          <a:prstDash val="solid"/>
+          <a:miter lim="800000"/>
+        </a:ln>
+        <a:ln w="19050" cap="flat" cmpd="sng" algn="ctr">
+          <a:solidFill>
+            <a:schemeClr val="phClr"/>
+          </a:solidFill>
+          <a:prstDash val="solid"/>
+          <a:miter lim="800000"/>
+        </a:ln>
+        <a:ln w="25400" cap="flat" cmpd="sng" algn="ctr">
+          <a:solidFill>
+            <a:schemeClr val="phClr"/>
+          </a:solidFill>
+          <a:prstDash val="solid"/>
+          <a:miter lim="800000"/>
+        </a:ln>
+      </a:lnStyleLst>
+      <a:effectStyleLst>
+        <a:effectStyle>
+          <a:effectLst/>
+        </a:effectStyle>
+        <a:effectStyle>
+          <a:effectLst/>
+        </a:effectStyle>
+        <a:effectStyle>
+          <a:effectLst>
+            <a:outerShdw blurRad="57150" dist="19050" dir="5400000" algn="ctr" rotWithShape="0">
+              <a:srgbClr val="000000">
+                <a:alpha val="63000"/>
+              </a:srgbClr>
+            </a:outerShdw>
+          </a:effectLst>
+        </a:effectStyle>
+      </a:effectStyleLst>
+      <a:bgFillStyleLst>
+        <a:solidFill>
+          <a:schemeClr val="phClr"/>
+        </a:solidFill>
+        <a:solidFill>
+          <a:schemeClr val="phClr">
+            <a:tint val="95000"/>
+            <a:satMod val="170000"/>
+          </a:schemeClr>
+        </a:solidFill>
+        <a:gradFill rotWithShape="1">
+          <a:gsLst>
+            <a:gs pos="0">
+              <a:schemeClr val="phClr">
+                <a:tint val="93000"/>
+                <a:satMod val="150000"/>
+                <a:shade val="98000"/>
+                <a:lumMod val="102000"/>
+              </a:schemeClr>
+            </a:gs>
+            <a:gs pos="50000">
+              <a:schemeClr val="phClr">
+                <a:tint val="98000"/>
+                <a:satMod val="130000"/>
+                <a:shade val="90000"/>
+                <a:lumMod val="103000"/>
+              </a:schemeClr>
+            </a:gs>
+            <a:gs pos="100000">
+              <a:schemeClr val="phClr">
+                <a:shade val="63000"/>
+                <a:satMod val="120000"/>
+              </a:schemeClr>
+            </a:gs>
+          </a:gsLst>
+          <a:lin ang="5400000" scaled="0"/>
+        </a:gradFill>
+      </a:bgFillStyleLst>
+    </a:fmtScheme>
+  </a:themeElements>
+  <a:objectDefaults>
+    <a:lnDef>
+      <a:spPr/>
+      <a:bodyPr/>
+      <a:lstStyle/>
+      <a:style>
+        <a:lnRef idx="2">
+          <a:schemeClr val="accent1"/>
+        </a:lnRef>
+        <a:fillRef idx="0">
+          <a:schemeClr val="accent1"/>
+        </a:fillRef>
+        <a:effectRef idx="1">
+          <a:schemeClr val="accent1"/>
+        </a:effectRef>
+        <a:fontRef idx="minor">
+          <a:schemeClr val="tx1"/>
+        </a:fontRef>
+      </a:style>
+    </a:lnDef>
+  </a:objectDefaults>
+  <a:extraClrSchemeLst/>
+  <a:extLst>
+    <a:ext uri="{05A4C25C-085E-4340-85A3-A5531E510DB2}">
+      <thm15:themeFamily xmlns:thm15="http://schemas.microsoft.com/office/thememl/2012/main" name="Office Theme" id="{2E142A2C-CD16-42D6-873A-C26D2A0506FA}" vid="{1BDDFF52-6CD6-40A5-AB3C-68EB2F1E4D0A}"/>
+    </a:ext>
+  </a:extLst>
+</a:theme>
 </file>